--- a/slides/morning_deck_scale_or_fail.pptx
+++ b/slides/morning_deck_scale_or_fail.pptx
@@ -4,23 +4,27 @@
   <p:sldMasterIdLst>
     <p:sldMasterId id="2147483648" r:id="rId1"/>
   </p:sldMasterIdLst>
+  <p:notesMasterIdLst>
+    <p:notesMasterId r:id="rId19"/>
+  </p:notesMasterIdLst>
   <p:sldIdLst>
-    <p:sldId id="256" r:id="rId7"/>
-    <p:sldId id="257" r:id="rId9"/>
-    <p:sldId id="258" r:id="rId10"/>
-    <p:sldId id="259" r:id="rId11"/>
-    <p:sldId id="260" r:id="rId12"/>
-    <p:sldId id="261" r:id="rId13"/>
-    <p:sldId id="262" r:id="rId14"/>
-    <p:sldId id="263" r:id="rId15"/>
-    <p:sldId id="264" r:id="rId16"/>
-    <p:sldId id="265" r:id="rId17"/>
-    <p:sldId id="266" r:id="rId18"/>
-    <p:sldId id="267" r:id="rId19"/>
-    <p:sldId id="268" r:id="rId20"/>
-    <p:sldId id="269" r:id="rId21"/>
-    <p:sldId id="270" r:id="rId22"/>
-    <p:sldId id="271" r:id="rId23"/>
+    <p:sldId id="256" r:id="rId2"/>
+    <p:sldId id="257" r:id="rId3"/>
+    <p:sldId id="258" r:id="rId4"/>
+    <p:sldId id="259" r:id="rId5"/>
+    <p:sldId id="260" r:id="rId6"/>
+    <p:sldId id="261" r:id="rId7"/>
+    <p:sldId id="262" r:id="rId8"/>
+    <p:sldId id="263" r:id="rId9"/>
+    <p:sldId id="264" r:id="rId10"/>
+    <p:sldId id="265" r:id="rId11"/>
+    <p:sldId id="266" r:id="rId12"/>
+    <p:sldId id="267" r:id="rId13"/>
+    <p:sldId id="268" r:id="rId14"/>
+    <p:sldId id="269" r:id="rId15"/>
+    <p:sldId id="270" r:id="rId16"/>
+    <p:sldId id="272" r:id="rId17"/>
+    <p:sldId id="271" r:id="rId18"/>
   </p:sldIdLst>
   <p:sldSz cx="9144000" cy="6858000" type="screen4x3"/>
   <p:notesSz cx="6858000" cy="9144000"/>
@@ -119,11 +123,384 @@
       </a:defRPr>
     </a:lvl9pPr>
   </p:defaultTextStyle>
+  <p:extLst>
+    <p:ext uri="{EFAFB233-063F-42B5-8137-9DF3F51BA10A}">
+      <p15:sldGuideLst xmlns:p15="http://schemas.microsoft.com/office/powerpoint/2012/main">
+        <p15:guide id="1" orient="horz" pos="2160">
+          <p15:clr>
+            <a:srgbClr val="A4A3A4"/>
+          </p15:clr>
+        </p15:guide>
+        <p15:guide id="2" pos="2880">
+          <p15:clr>
+            <a:srgbClr val="A4A3A4"/>
+          </p15:clr>
+        </p15:guide>
+      </p15:sldGuideLst>
+    </p:ext>
+  </p:extLst>
 </p:presentation>
 </file>
 
+<file path=ppt/revisionInfo.xml><?xml version="1.0" encoding="utf-8"?>
+<p1510:revInfo xmlns:a="http://schemas.openxmlformats.org/drawingml/2006/main" xmlns:r="http://schemas.openxmlformats.org/officeDocument/2006/relationships" xmlns:p1510="http://schemas.microsoft.com/office/powerpoint/2015/10/main">
+  <p1510:revLst>
+    <p1510:client id="{C17E1E09-63C0-4C14-854F-5455664E8FF8}" v="3" dt="2026-02-09T12:33:16.924"/>
+  </p1510:revLst>
+</p1510:revInfo>
+</file>
+
+<file path=ppt/changesInfos/changesInfo1.xml><?xml version="1.0" encoding="utf-8"?>
+<pc:chgInfo xmlns:a="http://schemas.openxmlformats.org/drawingml/2006/main" xmlns:r="http://schemas.openxmlformats.org/officeDocument/2006/relationships" xmlns:ac="http://schemas.microsoft.com/office/drawing/2013/main/command" xmlns:pc="http://schemas.microsoft.com/office/powerpoint/2013/main/command">
+  <pc:docChgLst>
+    <pc:chgData name="Mike Hoffman" userId="c89afae9-2ab1-4454-9d15-124c09a77240" providerId="ADAL" clId="{C92867C0-20CC-4CF3-B09C-9485EE8A71FC}"/>
+    <pc:docChg chg="undo custSel addSld modSld">
+      <pc:chgData name="Mike Hoffman" userId="c89afae9-2ab1-4454-9d15-124c09a77240" providerId="ADAL" clId="{C92867C0-20CC-4CF3-B09C-9485EE8A71FC}" dt="2026-02-09T12:33:35.481" v="761" actId="20577"/>
+      <pc:docMkLst>
+        <pc:docMk/>
+      </pc:docMkLst>
+      <pc:sldChg chg="addSp delSp modSp mod">
+        <pc:chgData name="Mike Hoffman" userId="c89afae9-2ab1-4454-9d15-124c09a77240" providerId="ADAL" clId="{C92867C0-20CC-4CF3-B09C-9485EE8A71FC}" dt="2026-02-09T12:28:56.261" v="351" actId="27636"/>
+        <pc:sldMkLst>
+          <pc:docMk/>
+          <pc:sldMk cId="0" sldId="256"/>
+        </pc:sldMkLst>
+        <pc:spChg chg="mod">
+          <ac:chgData name="Mike Hoffman" userId="c89afae9-2ab1-4454-9d15-124c09a77240" providerId="ADAL" clId="{C92867C0-20CC-4CF3-B09C-9485EE8A71FC}" dt="2026-02-09T12:28:56.261" v="351" actId="27636"/>
+          <ac:spMkLst>
+            <pc:docMk/>
+            <pc:sldMk cId="0" sldId="256"/>
+            <ac:spMk id="2" creationId="{00000000-0000-0000-0000-000000000000}"/>
+          </ac:spMkLst>
+        </pc:spChg>
+        <pc:spChg chg="del">
+          <ac:chgData name="Mike Hoffman" userId="c89afae9-2ab1-4454-9d15-124c09a77240" providerId="ADAL" clId="{C92867C0-20CC-4CF3-B09C-9485EE8A71FC}" dt="2026-02-09T12:25:30.753" v="0" actId="478"/>
+          <ac:spMkLst>
+            <pc:docMk/>
+            <pc:sldMk cId="0" sldId="256"/>
+            <ac:spMk id="3" creationId="{00000000-0000-0000-0000-000000000000}"/>
+          </ac:spMkLst>
+        </pc:spChg>
+        <pc:spChg chg="add del mod">
+          <ac:chgData name="Mike Hoffman" userId="c89afae9-2ab1-4454-9d15-124c09a77240" providerId="ADAL" clId="{C92867C0-20CC-4CF3-B09C-9485EE8A71FC}" dt="2026-02-09T12:26:04.716" v="99" actId="20577"/>
+          <ac:spMkLst>
+            <pc:docMk/>
+            <pc:sldMk cId="0" sldId="256"/>
+            <ac:spMk id="5" creationId="{9CFFCB58-81DB-5576-C29A-2DBEF1933535}"/>
+          </ac:spMkLst>
+        </pc:spChg>
+      </pc:sldChg>
+      <pc:sldChg chg="modSp mod">
+        <pc:chgData name="Mike Hoffman" userId="c89afae9-2ab1-4454-9d15-124c09a77240" providerId="ADAL" clId="{C92867C0-20CC-4CF3-B09C-9485EE8A71FC}" dt="2026-02-09T12:26:33.706" v="176" actId="5793"/>
+        <pc:sldMkLst>
+          <pc:docMk/>
+          <pc:sldMk cId="0" sldId="257"/>
+        </pc:sldMkLst>
+        <pc:spChg chg="mod">
+          <ac:chgData name="Mike Hoffman" userId="c89afae9-2ab1-4454-9d15-124c09a77240" providerId="ADAL" clId="{C92867C0-20CC-4CF3-B09C-9485EE8A71FC}" dt="2026-02-09T12:26:17.939" v="128" actId="20577"/>
+          <ac:spMkLst>
+            <pc:docMk/>
+            <pc:sldMk cId="0" sldId="257"/>
+            <ac:spMk id="2" creationId="{00000000-0000-0000-0000-000000000000}"/>
+          </ac:spMkLst>
+        </pc:spChg>
+        <pc:spChg chg="mod">
+          <ac:chgData name="Mike Hoffman" userId="c89afae9-2ab1-4454-9d15-124c09a77240" providerId="ADAL" clId="{C92867C0-20CC-4CF3-B09C-9485EE8A71FC}" dt="2026-02-09T12:26:33.706" v="176" actId="5793"/>
+          <ac:spMkLst>
+            <pc:docMk/>
+            <pc:sldMk cId="0" sldId="257"/>
+            <ac:spMk id="3" creationId="{00000000-0000-0000-0000-000000000000}"/>
+          </ac:spMkLst>
+        </pc:spChg>
+      </pc:sldChg>
+      <pc:sldChg chg="modSp mod">
+        <pc:chgData name="Mike Hoffman" userId="c89afae9-2ab1-4454-9d15-124c09a77240" providerId="ADAL" clId="{C92867C0-20CC-4CF3-B09C-9485EE8A71FC}" dt="2026-02-09T12:27:11.340" v="255" actId="255"/>
+        <pc:sldMkLst>
+          <pc:docMk/>
+          <pc:sldMk cId="0" sldId="258"/>
+        </pc:sldMkLst>
+        <pc:spChg chg="mod">
+          <ac:chgData name="Mike Hoffman" userId="c89afae9-2ab1-4454-9d15-124c09a77240" providerId="ADAL" clId="{C92867C0-20CC-4CF3-B09C-9485EE8A71FC}" dt="2026-02-09T12:26:38.461" v="177" actId="20577"/>
+          <ac:spMkLst>
+            <pc:docMk/>
+            <pc:sldMk cId="0" sldId="258"/>
+            <ac:spMk id="2" creationId="{00000000-0000-0000-0000-000000000000}"/>
+          </ac:spMkLst>
+        </pc:spChg>
+        <pc:spChg chg="mod">
+          <ac:chgData name="Mike Hoffman" userId="c89afae9-2ab1-4454-9d15-124c09a77240" providerId="ADAL" clId="{C92867C0-20CC-4CF3-B09C-9485EE8A71FC}" dt="2026-02-09T12:27:11.340" v="255" actId="255"/>
+          <ac:spMkLst>
+            <pc:docMk/>
+            <pc:sldMk cId="0" sldId="258"/>
+            <ac:spMk id="3" creationId="{00000000-0000-0000-0000-000000000000}"/>
+          </ac:spMkLst>
+        </pc:spChg>
+      </pc:sldChg>
+      <pc:sldChg chg="modSp mod">
+        <pc:chgData name="Mike Hoffman" userId="c89afae9-2ab1-4454-9d15-124c09a77240" providerId="ADAL" clId="{C92867C0-20CC-4CF3-B09C-9485EE8A71FC}" dt="2026-02-09T12:27:38.408" v="275" actId="20577"/>
+        <pc:sldMkLst>
+          <pc:docMk/>
+          <pc:sldMk cId="0" sldId="259"/>
+        </pc:sldMkLst>
+        <pc:spChg chg="mod">
+          <ac:chgData name="Mike Hoffman" userId="c89afae9-2ab1-4454-9d15-124c09a77240" providerId="ADAL" clId="{C92867C0-20CC-4CF3-B09C-9485EE8A71FC}" dt="2026-02-09T12:27:38.408" v="275" actId="20577"/>
+          <ac:spMkLst>
+            <pc:docMk/>
+            <pc:sldMk cId="0" sldId="259"/>
+            <ac:spMk id="3" creationId="{00000000-0000-0000-0000-000000000000}"/>
+          </ac:spMkLst>
+        </pc:spChg>
+      </pc:sldChg>
+      <pc:sldChg chg="modSp mod">
+        <pc:chgData name="Mike Hoffman" userId="c89afae9-2ab1-4454-9d15-124c09a77240" providerId="ADAL" clId="{C92867C0-20CC-4CF3-B09C-9485EE8A71FC}" dt="2026-02-09T12:28:13.701" v="334" actId="255"/>
+        <pc:sldMkLst>
+          <pc:docMk/>
+          <pc:sldMk cId="0" sldId="260"/>
+        </pc:sldMkLst>
+        <pc:spChg chg="mod">
+          <ac:chgData name="Mike Hoffman" userId="c89afae9-2ab1-4454-9d15-124c09a77240" providerId="ADAL" clId="{C92867C0-20CC-4CF3-B09C-9485EE8A71FC}" dt="2026-02-09T12:27:47.003" v="278" actId="20577"/>
+          <ac:spMkLst>
+            <pc:docMk/>
+            <pc:sldMk cId="0" sldId="260"/>
+            <ac:spMk id="2" creationId="{00000000-0000-0000-0000-000000000000}"/>
+          </ac:spMkLst>
+        </pc:spChg>
+        <pc:spChg chg="mod">
+          <ac:chgData name="Mike Hoffman" userId="c89afae9-2ab1-4454-9d15-124c09a77240" providerId="ADAL" clId="{C92867C0-20CC-4CF3-B09C-9485EE8A71FC}" dt="2026-02-09T12:28:13.701" v="334" actId="255"/>
+          <ac:spMkLst>
+            <pc:docMk/>
+            <pc:sldMk cId="0" sldId="260"/>
+            <ac:spMk id="3" creationId="{00000000-0000-0000-0000-000000000000}"/>
+          </ac:spMkLst>
+        </pc:spChg>
+      </pc:sldChg>
+      <pc:sldChg chg="modSp mod">
+        <pc:chgData name="Mike Hoffman" userId="c89afae9-2ab1-4454-9d15-124c09a77240" providerId="ADAL" clId="{C92867C0-20CC-4CF3-B09C-9485EE8A71FC}" dt="2026-02-09T12:28:31.979" v="342" actId="255"/>
+        <pc:sldMkLst>
+          <pc:docMk/>
+          <pc:sldMk cId="0" sldId="261"/>
+        </pc:sldMkLst>
+        <pc:spChg chg="mod">
+          <ac:chgData name="Mike Hoffman" userId="c89afae9-2ab1-4454-9d15-124c09a77240" providerId="ADAL" clId="{C92867C0-20CC-4CF3-B09C-9485EE8A71FC}" dt="2026-02-09T12:28:21.300" v="337" actId="20577"/>
+          <ac:spMkLst>
+            <pc:docMk/>
+            <pc:sldMk cId="0" sldId="261"/>
+            <ac:spMk id="2" creationId="{00000000-0000-0000-0000-000000000000}"/>
+          </ac:spMkLst>
+        </pc:spChg>
+        <pc:spChg chg="mod">
+          <ac:chgData name="Mike Hoffman" userId="c89afae9-2ab1-4454-9d15-124c09a77240" providerId="ADAL" clId="{C92867C0-20CC-4CF3-B09C-9485EE8A71FC}" dt="2026-02-09T12:28:31.979" v="342" actId="255"/>
+          <ac:spMkLst>
+            <pc:docMk/>
+            <pc:sldMk cId="0" sldId="261"/>
+            <ac:spMk id="3" creationId="{00000000-0000-0000-0000-000000000000}"/>
+          </ac:spMkLst>
+        </pc:spChg>
+      </pc:sldChg>
+      <pc:sldChg chg="modSp mod">
+        <pc:chgData name="Mike Hoffman" userId="c89afae9-2ab1-4454-9d15-124c09a77240" providerId="ADAL" clId="{C92867C0-20CC-4CF3-B09C-9485EE8A71FC}" dt="2026-02-09T12:28:37.488" v="343" actId="15"/>
+        <pc:sldMkLst>
+          <pc:docMk/>
+          <pc:sldMk cId="0" sldId="262"/>
+        </pc:sldMkLst>
+        <pc:spChg chg="mod">
+          <ac:chgData name="Mike Hoffman" userId="c89afae9-2ab1-4454-9d15-124c09a77240" providerId="ADAL" clId="{C92867C0-20CC-4CF3-B09C-9485EE8A71FC}" dt="2026-02-09T12:28:37.488" v="343" actId="15"/>
+          <ac:spMkLst>
+            <pc:docMk/>
+            <pc:sldMk cId="0" sldId="262"/>
+            <ac:spMk id="3" creationId="{00000000-0000-0000-0000-000000000000}"/>
+          </ac:spMkLst>
+        </pc:spChg>
+      </pc:sldChg>
+      <pc:sldChg chg="modSp mod">
+        <pc:chgData name="Mike Hoffman" userId="c89afae9-2ab1-4454-9d15-124c09a77240" providerId="ADAL" clId="{C92867C0-20CC-4CF3-B09C-9485EE8A71FC}" dt="2026-02-09T12:29:02.484" v="374" actId="5793"/>
+        <pc:sldMkLst>
+          <pc:docMk/>
+          <pc:sldMk cId="0" sldId="263"/>
+        </pc:sldMkLst>
+        <pc:spChg chg="mod">
+          <ac:chgData name="Mike Hoffman" userId="c89afae9-2ab1-4454-9d15-124c09a77240" providerId="ADAL" clId="{C92867C0-20CC-4CF3-B09C-9485EE8A71FC}" dt="2026-02-09T12:28:52.485" v="345" actId="21"/>
+          <ac:spMkLst>
+            <pc:docMk/>
+            <pc:sldMk cId="0" sldId="263"/>
+            <ac:spMk id="2" creationId="{00000000-0000-0000-0000-000000000000}"/>
+          </ac:spMkLst>
+        </pc:spChg>
+        <pc:spChg chg="mod">
+          <ac:chgData name="Mike Hoffman" userId="c89afae9-2ab1-4454-9d15-124c09a77240" providerId="ADAL" clId="{C92867C0-20CC-4CF3-B09C-9485EE8A71FC}" dt="2026-02-09T12:29:02.484" v="374" actId="5793"/>
+          <ac:spMkLst>
+            <pc:docMk/>
+            <pc:sldMk cId="0" sldId="263"/>
+            <ac:spMk id="3" creationId="{00000000-0000-0000-0000-000000000000}"/>
+          </ac:spMkLst>
+        </pc:spChg>
+      </pc:sldChg>
+      <pc:sldChg chg="modSp mod">
+        <pc:chgData name="Mike Hoffman" userId="c89afae9-2ab1-4454-9d15-124c09a77240" providerId="ADAL" clId="{C92867C0-20CC-4CF3-B09C-9485EE8A71FC}" dt="2026-02-09T12:29:30.560" v="389" actId="20577"/>
+        <pc:sldMkLst>
+          <pc:docMk/>
+          <pc:sldMk cId="0" sldId="264"/>
+        </pc:sldMkLst>
+        <pc:spChg chg="mod">
+          <ac:chgData name="Mike Hoffman" userId="c89afae9-2ab1-4454-9d15-124c09a77240" providerId="ADAL" clId="{C92867C0-20CC-4CF3-B09C-9485EE8A71FC}" dt="2026-02-09T12:29:30.560" v="389" actId="20577"/>
+          <ac:spMkLst>
+            <pc:docMk/>
+            <pc:sldMk cId="0" sldId="264"/>
+            <ac:spMk id="3" creationId="{00000000-0000-0000-0000-000000000000}"/>
+          </ac:spMkLst>
+        </pc:spChg>
+      </pc:sldChg>
+      <pc:sldChg chg="modSp mod">
+        <pc:chgData name="Mike Hoffman" userId="c89afae9-2ab1-4454-9d15-124c09a77240" providerId="ADAL" clId="{C92867C0-20CC-4CF3-B09C-9485EE8A71FC}" dt="2026-02-09T12:31:01.490" v="658" actId="20577"/>
+        <pc:sldMkLst>
+          <pc:docMk/>
+          <pc:sldMk cId="0" sldId="265"/>
+        </pc:sldMkLst>
+        <pc:spChg chg="mod">
+          <ac:chgData name="Mike Hoffman" userId="c89afae9-2ab1-4454-9d15-124c09a77240" providerId="ADAL" clId="{C92867C0-20CC-4CF3-B09C-9485EE8A71FC}" dt="2026-02-09T12:29:38.748" v="390" actId="20577"/>
+          <ac:spMkLst>
+            <pc:docMk/>
+            <pc:sldMk cId="0" sldId="265"/>
+            <ac:spMk id="2" creationId="{00000000-0000-0000-0000-000000000000}"/>
+          </ac:spMkLst>
+        </pc:spChg>
+        <pc:spChg chg="mod">
+          <ac:chgData name="Mike Hoffman" userId="c89afae9-2ab1-4454-9d15-124c09a77240" providerId="ADAL" clId="{C92867C0-20CC-4CF3-B09C-9485EE8A71FC}" dt="2026-02-09T12:31:01.490" v="658" actId="20577"/>
+          <ac:spMkLst>
+            <pc:docMk/>
+            <pc:sldMk cId="0" sldId="265"/>
+            <ac:spMk id="3" creationId="{00000000-0000-0000-0000-000000000000}"/>
+          </ac:spMkLst>
+        </pc:spChg>
+      </pc:sldChg>
+      <pc:sldChg chg="modSp mod">
+        <pc:chgData name="Mike Hoffman" userId="c89afae9-2ab1-4454-9d15-124c09a77240" providerId="ADAL" clId="{C92867C0-20CC-4CF3-B09C-9485EE8A71FC}" dt="2026-02-09T12:31:30.130" v="694" actId="15"/>
+        <pc:sldMkLst>
+          <pc:docMk/>
+          <pc:sldMk cId="0" sldId="266"/>
+        </pc:sldMkLst>
+        <pc:spChg chg="mod">
+          <ac:chgData name="Mike Hoffman" userId="c89afae9-2ab1-4454-9d15-124c09a77240" providerId="ADAL" clId="{C92867C0-20CC-4CF3-B09C-9485EE8A71FC}" dt="2026-02-09T12:31:11.735" v="659" actId="20577"/>
+          <ac:spMkLst>
+            <pc:docMk/>
+            <pc:sldMk cId="0" sldId="266"/>
+            <ac:spMk id="2" creationId="{00000000-0000-0000-0000-000000000000}"/>
+          </ac:spMkLst>
+        </pc:spChg>
+        <pc:spChg chg="mod">
+          <ac:chgData name="Mike Hoffman" userId="c89afae9-2ab1-4454-9d15-124c09a77240" providerId="ADAL" clId="{C92867C0-20CC-4CF3-B09C-9485EE8A71FC}" dt="2026-02-09T12:31:30.130" v="694" actId="15"/>
+          <ac:spMkLst>
+            <pc:docMk/>
+            <pc:sldMk cId="0" sldId="266"/>
+            <ac:spMk id="3" creationId="{00000000-0000-0000-0000-000000000000}"/>
+          </ac:spMkLst>
+        </pc:spChg>
+      </pc:sldChg>
+      <pc:sldChg chg="modSp mod">
+        <pc:chgData name="Mike Hoffman" userId="c89afae9-2ab1-4454-9d15-124c09a77240" providerId="ADAL" clId="{C92867C0-20CC-4CF3-B09C-9485EE8A71FC}" dt="2026-02-09T12:31:48.963" v="701" actId="14"/>
+        <pc:sldMkLst>
+          <pc:docMk/>
+          <pc:sldMk cId="0" sldId="267"/>
+        </pc:sldMkLst>
+        <pc:spChg chg="mod">
+          <ac:chgData name="Mike Hoffman" userId="c89afae9-2ab1-4454-9d15-124c09a77240" providerId="ADAL" clId="{C92867C0-20CC-4CF3-B09C-9485EE8A71FC}" dt="2026-02-09T12:31:48.963" v="701" actId="14"/>
+          <ac:spMkLst>
+            <pc:docMk/>
+            <pc:sldMk cId="0" sldId="267"/>
+            <ac:spMk id="3" creationId="{00000000-0000-0000-0000-000000000000}"/>
+          </ac:spMkLst>
+        </pc:spChg>
+      </pc:sldChg>
+      <pc:sldChg chg="modSp mod">
+        <pc:chgData name="Mike Hoffman" userId="c89afae9-2ab1-4454-9d15-124c09a77240" providerId="ADAL" clId="{C92867C0-20CC-4CF3-B09C-9485EE8A71FC}" dt="2026-02-09T12:32:40.795" v="743" actId="5793"/>
+        <pc:sldMkLst>
+          <pc:docMk/>
+          <pc:sldMk cId="0" sldId="268"/>
+        </pc:sldMkLst>
+        <pc:spChg chg="mod">
+          <ac:chgData name="Mike Hoffman" userId="c89afae9-2ab1-4454-9d15-124c09a77240" providerId="ADAL" clId="{C92867C0-20CC-4CF3-B09C-9485EE8A71FC}" dt="2026-02-09T12:32:01.811" v="717" actId="20577"/>
+          <ac:spMkLst>
+            <pc:docMk/>
+            <pc:sldMk cId="0" sldId="268"/>
+            <ac:spMk id="2" creationId="{00000000-0000-0000-0000-000000000000}"/>
+          </ac:spMkLst>
+        </pc:spChg>
+        <pc:spChg chg="mod">
+          <ac:chgData name="Mike Hoffman" userId="c89afae9-2ab1-4454-9d15-124c09a77240" providerId="ADAL" clId="{C92867C0-20CC-4CF3-B09C-9485EE8A71FC}" dt="2026-02-09T12:32:40.795" v="743" actId="5793"/>
+          <ac:spMkLst>
+            <pc:docMk/>
+            <pc:sldMk cId="0" sldId="268"/>
+            <ac:spMk id="3" creationId="{00000000-0000-0000-0000-000000000000}"/>
+          </ac:spMkLst>
+        </pc:spChg>
+      </pc:sldChg>
+      <pc:sldChg chg="modSp mod">
+        <pc:chgData name="Mike Hoffman" userId="c89afae9-2ab1-4454-9d15-124c09a77240" providerId="ADAL" clId="{C92867C0-20CC-4CF3-B09C-9485EE8A71FC}" dt="2026-02-09T12:32:51.059" v="746" actId="20577"/>
+        <pc:sldMkLst>
+          <pc:docMk/>
+          <pc:sldMk cId="0" sldId="269"/>
+        </pc:sldMkLst>
+        <pc:spChg chg="mod">
+          <ac:chgData name="Mike Hoffman" userId="c89afae9-2ab1-4454-9d15-124c09a77240" providerId="ADAL" clId="{C92867C0-20CC-4CF3-B09C-9485EE8A71FC}" dt="2026-02-09T12:32:51.059" v="746" actId="20577"/>
+          <ac:spMkLst>
+            <pc:docMk/>
+            <pc:sldMk cId="0" sldId="269"/>
+            <ac:spMk id="3" creationId="{00000000-0000-0000-0000-000000000000}"/>
+          </ac:spMkLst>
+        </pc:spChg>
+      </pc:sldChg>
+      <pc:sldChg chg="modSp mod">
+        <pc:chgData name="Mike Hoffman" userId="c89afae9-2ab1-4454-9d15-124c09a77240" providerId="ADAL" clId="{C92867C0-20CC-4CF3-B09C-9485EE8A71FC}" dt="2026-02-09T12:33:09.363" v="751" actId="21"/>
+        <pc:sldMkLst>
+          <pc:docMk/>
+          <pc:sldMk cId="0" sldId="270"/>
+        </pc:sldMkLst>
+        <pc:spChg chg="mod">
+          <ac:chgData name="Mike Hoffman" userId="c89afae9-2ab1-4454-9d15-124c09a77240" providerId="ADAL" clId="{C92867C0-20CC-4CF3-B09C-9485EE8A71FC}" dt="2026-02-09T12:33:09.363" v="751" actId="21"/>
+          <ac:spMkLst>
+            <pc:docMk/>
+            <pc:sldMk cId="0" sldId="270"/>
+            <ac:spMk id="3" creationId="{00000000-0000-0000-0000-000000000000}"/>
+          </ac:spMkLst>
+        </pc:spChg>
+      </pc:sldChg>
+      <pc:sldChg chg="modSp mod">
+        <pc:chgData name="Mike Hoffman" userId="c89afae9-2ab1-4454-9d15-124c09a77240" providerId="ADAL" clId="{C92867C0-20CC-4CF3-B09C-9485EE8A71FC}" dt="2026-02-09T12:33:35.481" v="761" actId="20577"/>
+        <pc:sldMkLst>
+          <pc:docMk/>
+          <pc:sldMk cId="0" sldId="271"/>
+        </pc:sldMkLst>
+        <pc:spChg chg="mod">
+          <ac:chgData name="Mike Hoffman" userId="c89afae9-2ab1-4454-9d15-124c09a77240" providerId="ADAL" clId="{C92867C0-20CC-4CF3-B09C-9485EE8A71FC}" dt="2026-02-09T12:33:35.481" v="761" actId="20577"/>
+          <ac:spMkLst>
+            <pc:docMk/>
+            <pc:sldMk cId="0" sldId="271"/>
+            <ac:spMk id="2" creationId="{00000000-0000-0000-0000-000000000000}"/>
+          </ac:spMkLst>
+        </pc:spChg>
+      </pc:sldChg>
+      <pc:sldChg chg="modSp add mod">
+        <pc:chgData name="Mike Hoffman" userId="c89afae9-2ab1-4454-9d15-124c09a77240" providerId="ADAL" clId="{C92867C0-20CC-4CF3-B09C-9485EE8A71FC}" dt="2026-02-09T12:33:26.814" v="760" actId="114"/>
+        <pc:sldMkLst>
+          <pc:docMk/>
+          <pc:sldMk cId="716829734" sldId="272"/>
+        </pc:sldMkLst>
+        <pc:spChg chg="mod">
+          <ac:chgData name="Mike Hoffman" userId="c89afae9-2ab1-4454-9d15-124c09a77240" providerId="ADAL" clId="{C92867C0-20CC-4CF3-B09C-9485EE8A71FC}" dt="2026-02-09T12:33:26.814" v="760" actId="114"/>
+          <ac:spMkLst>
+            <pc:docMk/>
+            <pc:sldMk cId="716829734" sldId="272"/>
+            <ac:spMk id="3" creationId="{50AF965A-2EB0-F397-5D1B-A03BBF88CCC7}"/>
+          </ac:spMkLst>
+        </pc:spChg>
+      </pc:sldChg>
+    </pc:docChg>
+  </pc:docChgLst>
+</pc:chgInfo>
+</file>
+
 <file path=ppt/notesMasters/notesMaster1.xml><?xml version="1.0" encoding="utf-8"?>
-<p:notesMaster xmlns:a="http://schemas.openxmlformats.org/drawingml/2006/main" xmlns:p="http://schemas.openxmlformats.org/presentationml/2006/main" xmlns:r="http://schemas.openxmlformats.org/officeDocument/2006/relationships">
+<p:notesMaster xmlns:a="http://schemas.openxmlformats.org/drawingml/2006/main" xmlns:r="http://schemas.openxmlformats.org/officeDocument/2006/relationships" xmlns:p="http://schemas.openxmlformats.org/presentationml/2006/main">
   <p:cSld>
     <p:bg>
       <p:bgRef idx="1001">
@@ -144,241 +521,16 @@
           <a:chExt cx="0" cy="0"/>
         </a:xfrm>
       </p:grpSpPr>
-      <p:sp>
-        <p:nvSpPr>
-          <p:cNvPr id="2" name="Header Placeholder 1"/>
-          <p:cNvSpPr>
-            <a:spLocks noGrp="1"/>
-          </p:cNvSpPr>
-          <p:nvPr>
-            <p:ph type="hdr" sz="quarter"/>
-          </p:nvPr>
-        </p:nvSpPr>
-        <p:spPr>
-          <a:xfrm>
-            <a:off x="0" y="0"/>
-            <a:ext cx="2971800" cy="457200"/>
-          </a:xfrm>
-          <a:prstGeom prst="rect">
-            <a:avLst/>
-          </a:prstGeom>
-        </p:spPr>
-        <p:txBody>
-          <a:bodyPr vert="horz" lIns="91440" tIns="45720" rIns="91440" bIns="45720" rtlCol="0"/>
-          <a:lstStyle>
-            <a:lvl1pPr algn="l">
-              <a:defRPr sz="1200"/>
-            </a:lvl1pPr>
-          </a:lstStyle>
-          <a:p>
-            <a:endParaRPr lang="en-US"/>
-          </a:p>
-        </p:txBody>
-      </p:sp>
-      <p:sp>
-        <p:nvSpPr>
-          <p:cNvPr id="3" name="Date Placeholder 2"/>
-          <p:cNvSpPr>
-            <a:spLocks noGrp="1"/>
-          </p:cNvSpPr>
-          <p:nvPr>
-            <p:ph type="dt" idx="1"/>
-          </p:nvPr>
-        </p:nvSpPr>
-        <p:spPr>
-          <a:xfrm>
-            <a:off x="3884613" y="0"/>
-            <a:ext cx="2971800" cy="457200"/>
-          </a:xfrm>
-          <a:prstGeom prst="rect">
-            <a:avLst/>
-          </a:prstGeom>
-        </p:spPr>
-        <p:txBody>
-          <a:bodyPr vert="horz" lIns="91440" tIns="45720" rIns="91440" bIns="45720" rtlCol="0"/>
-          <a:lstStyle>
-            <a:lvl1pPr algn="r">
-              <a:defRPr sz="1200"/>
-            </a:lvl1pPr>
-          </a:lstStyle>
-          <a:p>
-            <a:fld id="{0F89C1C7-3DCD-1040-A9CF-14679D8B5DDD}" type="datetimeFigureOut">
-              <a:rPr lang="en-US" smtClean="0"/>
-              <a:t>10/17/16</a:t>
-            </a:fld>
-            <a:endParaRPr lang="en-US"/>
-          </a:p>
-        </p:txBody>
-      </p:sp>
-      <p:sp>
-        <p:nvSpPr>
-          <p:cNvPr id="4" name="Slide Image Placeholder 3"/>
-          <p:cNvSpPr>
-            <a:spLocks noGrp="1" noRot="1" noChangeAspect="1"/>
-          </p:cNvSpPr>
-          <p:nvPr>
-            <p:ph type="sldImg" idx="2"/>
-          </p:nvPr>
-        </p:nvSpPr>
-        <p:spPr>
-          <a:xfrm>
-            <a:off x="1143000" y="685800"/>
-            <a:ext cx="4572000" cy="3429000"/>
-          </a:xfrm>
-          <a:prstGeom prst="rect">
-            <a:avLst/>
-          </a:prstGeom>
-          <a:noFill/>
-          <a:ln w="12700">
-            <a:solidFill>
-              <a:prstClr val="black"/>
-            </a:solidFill>
-          </a:ln>
-        </p:spPr>
-        <p:txBody>
-          <a:bodyPr vert="horz" lIns="91440" tIns="45720" rIns="91440" bIns="45720" rtlCol="0" anchor="ctr"/>
-          <a:lstStyle/>
-          <a:p>
-            <a:endParaRPr lang="en-US"/>
-          </a:p>
-        </p:txBody>
-      </p:sp>
-      <p:sp>
-        <p:nvSpPr>
-          <p:cNvPr id="5" name="Notes Placeholder 4"/>
-          <p:cNvSpPr>
-            <a:spLocks noGrp="1"/>
-          </p:cNvSpPr>
-          <p:nvPr>
-            <p:ph type="body" sz="quarter" idx="3"/>
-          </p:nvPr>
-        </p:nvSpPr>
-        <p:spPr>
-          <a:xfrm>
-            <a:off x="685800" y="4343400"/>
-            <a:ext cx="5486400" cy="4114800"/>
-          </a:xfrm>
-          <a:prstGeom prst="rect">
-            <a:avLst/>
-          </a:prstGeom>
-        </p:spPr>
-        <p:txBody>
-          <a:bodyPr vert="horz" lIns="91440" tIns="45720" rIns="91440" bIns="45720" rtlCol="0"/>
-          <a:lstStyle/>
-          <a:p>
-            <a:pPr lvl="0"/>
-            <a:r>
-              <a:rPr lang="en-US" smtClean="0"/>
-              <a:t>Click to edit Master text styles</a:t>
-            </a:r>
-          </a:p>
-          <a:p>
-            <a:pPr lvl="1"/>
-            <a:r>
-              <a:rPr lang="en-US" smtClean="0"/>
-              <a:t>Second level</a:t>
-            </a:r>
-          </a:p>
-          <a:p>
-            <a:pPr lvl="2"/>
-            <a:r>
-              <a:rPr lang="en-US" smtClean="0"/>
-              <a:t>Third level</a:t>
-            </a:r>
-          </a:p>
-          <a:p>
-            <a:pPr lvl="3"/>
-            <a:r>
-              <a:rPr lang="en-US" smtClean="0"/>
-              <a:t>Fourth level</a:t>
-            </a:r>
-          </a:p>
-          <a:p>
-            <a:pPr lvl="4"/>
-            <a:r>
-              <a:rPr lang="en-US" smtClean="0"/>
-              <a:t>Fifth level</a:t>
-            </a:r>
-            <a:endParaRPr lang="en-US"/>
-          </a:p>
-        </p:txBody>
-      </p:sp>
-      <p:sp>
-        <p:nvSpPr>
-          <p:cNvPr id="6" name="Footer Placeholder 5"/>
-          <p:cNvSpPr>
-            <a:spLocks noGrp="1"/>
-          </p:cNvSpPr>
-          <p:nvPr>
-            <p:ph type="ftr" sz="quarter" idx="4"/>
-          </p:nvPr>
-        </p:nvSpPr>
-        <p:spPr>
-          <a:xfrm>
-            <a:off x="0" y="8685213"/>
-            <a:ext cx="2971800" cy="457200"/>
-          </a:xfrm>
-          <a:prstGeom prst="rect">
-            <a:avLst/>
-          </a:prstGeom>
-        </p:spPr>
-        <p:txBody>
-          <a:bodyPr vert="horz" lIns="91440" tIns="45720" rIns="91440" bIns="45720" rtlCol="0" anchor="b"/>
-          <a:lstStyle>
-            <a:lvl1pPr algn="l">
-              <a:defRPr sz="1200"/>
-            </a:lvl1pPr>
-          </a:lstStyle>
-          <a:p>
-            <a:endParaRPr lang="en-US"/>
-          </a:p>
-        </p:txBody>
-      </p:sp>
-      <p:sp>
-        <p:nvSpPr>
-          <p:cNvPr id="7" name="Slide Number Placeholder 6"/>
-          <p:cNvSpPr>
-            <a:spLocks noGrp="1"/>
-          </p:cNvSpPr>
-          <p:nvPr>
-            <p:ph type="sldNum" sz="quarter" idx="5"/>
-          </p:nvPr>
-        </p:nvSpPr>
-        <p:spPr>
-          <a:xfrm>
-            <a:off x="3884613" y="8685213"/>
-            <a:ext cx="2971800" cy="457200"/>
-          </a:xfrm>
-          <a:prstGeom prst="rect">
-            <a:avLst/>
-          </a:prstGeom>
-        </p:spPr>
-        <p:txBody>
-          <a:bodyPr vert="horz" lIns="91440" tIns="45720" rIns="91440" bIns="45720" rtlCol="0" anchor="b"/>
-          <a:lstStyle>
-            <a:lvl1pPr algn="r">
-              <a:defRPr sz="1200"/>
-            </a:lvl1pPr>
-          </a:lstStyle>
-          <a:p>
-            <a:fld id="{BB5E49A5-4136-284D-997B-48E1D791AD67}" type="slidenum">
-              <a:rPr lang="en-US" smtClean="0"/>
-              <a:t>‹#›</a:t>
-            </a:fld>
-            <a:endParaRPr lang="en-US"/>
-          </a:p>
-        </p:txBody>
-      </p:sp>
     </p:spTree>
     <p:extLst>
       <p:ext uri="{BB962C8B-B14F-4D97-AF65-F5344CB8AC3E}">
-        <p14:creationId xmlns:p14="http://schemas.microsoft.com/office/powerpoint/2010/main" val="2623252185"/>
+        <p14:creationId xmlns:p14="http://schemas.microsoft.com/office/powerpoint/2010/main" val="1006560726"/>
       </p:ext>
     </p:extLst>
   </p:cSld>
   <p:clrMap bg1="lt1" tx1="dk1" bg2="lt2" tx2="dk2" accent1="accent1" accent2="accent2" accent3="accent3" accent4="accent4" accent5="accent5" accent6="accent6" hlink="hlink" folHlink="folHlink"/>
   <p:notesStyle>
-    <a:lvl1pPr marL="0" algn="l" defTabSz="457200" rtl="0" eaLnBrk="1" latinLnBrk="0" hangingPunct="1">
+    <a:lvl1pPr marL="0" algn="l" defTabSz="914400" rtl="0" eaLnBrk="1" latinLnBrk="0" hangingPunct="1">
       <a:defRPr sz="1200" kern="1200">
         <a:solidFill>
           <a:schemeClr val="tx1"/>
@@ -388,7 +540,7 @@
         <a:cs typeface="+mn-cs"/>
       </a:defRPr>
     </a:lvl1pPr>
-    <a:lvl2pPr marL="457200" algn="l" defTabSz="457200" rtl="0" eaLnBrk="1" latinLnBrk="0" hangingPunct="1">
+    <a:lvl2pPr marL="457200" algn="l" defTabSz="914400" rtl="0" eaLnBrk="1" latinLnBrk="0" hangingPunct="1">
       <a:defRPr sz="1200" kern="1200">
         <a:solidFill>
           <a:schemeClr val="tx1"/>
@@ -398,7 +550,7 @@
         <a:cs typeface="+mn-cs"/>
       </a:defRPr>
     </a:lvl2pPr>
-    <a:lvl3pPr marL="914400" algn="l" defTabSz="457200" rtl="0" eaLnBrk="1" latinLnBrk="0" hangingPunct="1">
+    <a:lvl3pPr marL="914400" algn="l" defTabSz="914400" rtl="0" eaLnBrk="1" latinLnBrk="0" hangingPunct="1">
       <a:defRPr sz="1200" kern="1200">
         <a:solidFill>
           <a:schemeClr val="tx1"/>
@@ -408,7 +560,7 @@
         <a:cs typeface="+mn-cs"/>
       </a:defRPr>
     </a:lvl3pPr>
-    <a:lvl4pPr marL="1371600" algn="l" defTabSz="457200" rtl="0" eaLnBrk="1" latinLnBrk="0" hangingPunct="1">
+    <a:lvl4pPr marL="1371600" algn="l" defTabSz="914400" rtl="0" eaLnBrk="1" latinLnBrk="0" hangingPunct="1">
       <a:defRPr sz="1200" kern="1200">
         <a:solidFill>
           <a:schemeClr val="tx1"/>
@@ -418,7 +570,7 @@
         <a:cs typeface="+mn-cs"/>
       </a:defRPr>
     </a:lvl4pPr>
-    <a:lvl5pPr marL="1828800" algn="l" defTabSz="457200" rtl="0" eaLnBrk="1" latinLnBrk="0" hangingPunct="1">
+    <a:lvl5pPr marL="1828800" algn="l" defTabSz="914400" rtl="0" eaLnBrk="1" latinLnBrk="0" hangingPunct="1">
       <a:defRPr sz="1200" kern="1200">
         <a:solidFill>
           <a:schemeClr val="tx1"/>
@@ -428,7 +580,7 @@
         <a:cs typeface="+mn-cs"/>
       </a:defRPr>
     </a:lvl5pPr>
-    <a:lvl6pPr marL="2286000" algn="l" defTabSz="457200" rtl="0" eaLnBrk="1" latinLnBrk="0" hangingPunct="1">
+    <a:lvl6pPr marL="2286000" algn="l" defTabSz="914400" rtl="0" eaLnBrk="1" latinLnBrk="0" hangingPunct="1">
       <a:defRPr sz="1200" kern="1200">
         <a:solidFill>
           <a:schemeClr val="tx1"/>
@@ -438,7 +590,7 @@
         <a:cs typeface="+mn-cs"/>
       </a:defRPr>
     </a:lvl6pPr>
-    <a:lvl7pPr marL="2743200" algn="l" defTabSz="457200" rtl="0" eaLnBrk="1" latinLnBrk="0" hangingPunct="1">
+    <a:lvl7pPr marL="2743200" algn="l" defTabSz="914400" rtl="0" eaLnBrk="1" latinLnBrk="0" hangingPunct="1">
       <a:defRPr sz="1200" kern="1200">
         <a:solidFill>
           <a:schemeClr val="tx1"/>
@@ -448,7 +600,7 @@
         <a:cs typeface="+mn-cs"/>
       </a:defRPr>
     </a:lvl7pPr>
-    <a:lvl8pPr marL="3200400" algn="l" defTabSz="457200" rtl="0" eaLnBrk="1" latinLnBrk="0" hangingPunct="1">
+    <a:lvl8pPr marL="3200400" algn="l" defTabSz="914400" rtl="0" eaLnBrk="1" latinLnBrk="0" hangingPunct="1">
       <a:defRPr sz="1200" kern="1200">
         <a:solidFill>
           <a:schemeClr val="tx1"/>
@@ -458,7 +610,7 @@
         <a:cs typeface="+mn-cs"/>
       </a:defRPr>
     </a:lvl8pPr>
-    <a:lvl9pPr marL="3657600" algn="l" defTabSz="457200" rtl="0" eaLnBrk="1" latinLnBrk="0" hangingPunct="1">
+    <a:lvl9pPr marL="3657600" algn="l" defTabSz="914400" rtl="0" eaLnBrk="1" latinLnBrk="0" hangingPunct="1">
       <a:defRPr sz="1200" kern="1200">
         <a:solidFill>
           <a:schemeClr val="tx1"/>
@@ -473,7 +625,7 @@
 </file>
 
 <file path=ppt/notesSlides/notesSlide1.xml><?xml version="1.0" encoding="utf-8"?>
-<p:notes xmlns:a="http://schemas.openxmlformats.org/drawingml/2006/main" xmlns:p="http://schemas.openxmlformats.org/presentationml/2006/main" xmlns:r="http://schemas.openxmlformats.org/officeDocument/2006/relationships">
+<p:notes xmlns:a="http://schemas.openxmlformats.org/drawingml/2006/main" xmlns:r="http://schemas.openxmlformats.org/officeDocument/2006/relationships" xmlns:p="http://schemas.openxmlformats.org/presentationml/2006/main">
   <p:cSld>
     <p:spTree>
       <p:nvGrpSpPr>
@@ -493,7 +645,7 @@
         <p:nvSpPr>
           <p:cNvPr id="2" name="Slide Image Placeholder 1"/>
           <p:cNvSpPr>
-            <a:spLocks noGrp="1"/>
+            <a:spLocks noGrp="1" noRot="1" noChangeAspect="1"/>
           </p:cNvSpPr>
           <p:nvPr>
             <p:ph type="sldImg" idx="2"/>
@@ -508,7 +660,7 @@
             <a:spLocks noGrp="1"/>
           </p:cNvSpPr>
           <p:nvPr>
-            <p:ph type="body" idx="3" sz="quarter"/>
+            <p:ph type="body" sz="quarter" idx="3"/>
           </p:nvPr>
         </p:nvSpPr>
         <p:spPr/>
@@ -534,7 +686,7 @@
             <a:spLocks noGrp="1"/>
           </p:cNvSpPr>
           <p:nvPr>
-            <p:ph type="sldNum" idx="5" sz="quarter"/>
+            <p:ph type="sldNum" sz="quarter" idx="5"/>
           </p:nvPr>
         </p:nvSpPr>
         <p:spPr/>
@@ -548,7 +700,7 @@
 </file>
 
 <file path=ppt/notesSlides/notesSlide10.xml><?xml version="1.0" encoding="utf-8"?>
-<p:notes xmlns:a="http://schemas.openxmlformats.org/drawingml/2006/main" xmlns:p="http://schemas.openxmlformats.org/presentationml/2006/main" xmlns:r="http://schemas.openxmlformats.org/officeDocument/2006/relationships">
+<p:notes xmlns:a="http://schemas.openxmlformats.org/drawingml/2006/main" xmlns:r="http://schemas.openxmlformats.org/officeDocument/2006/relationships" xmlns:p="http://schemas.openxmlformats.org/presentationml/2006/main">
   <p:cSld>
     <p:spTree>
       <p:nvGrpSpPr>
@@ -568,7 +720,7 @@
         <p:nvSpPr>
           <p:cNvPr id="2" name="Slide Image Placeholder 1"/>
           <p:cNvSpPr>
-            <a:spLocks noGrp="1"/>
+            <a:spLocks noGrp="1" noRot="1" noChangeAspect="1"/>
           </p:cNvSpPr>
           <p:nvPr>
             <p:ph type="sldImg" idx="2"/>
@@ -583,7 +735,7 @@
             <a:spLocks noGrp="1"/>
           </p:cNvSpPr>
           <p:nvPr>
-            <p:ph type="body" idx="3" sz="quarter"/>
+            <p:ph type="body" sz="quarter" idx="3"/>
           </p:nvPr>
         </p:nvSpPr>
         <p:spPr/>
@@ -604,7 +756,7 @@
             <a:spLocks noGrp="1"/>
           </p:cNvSpPr>
           <p:nvPr>
-            <p:ph type="sldNum" idx="5" sz="quarter"/>
+            <p:ph type="sldNum" sz="quarter" idx="5"/>
           </p:nvPr>
         </p:nvSpPr>
         <p:spPr/>
@@ -618,7 +770,7 @@
 </file>
 
 <file path=ppt/notesSlides/notesSlide11.xml><?xml version="1.0" encoding="utf-8"?>
-<p:notes xmlns:a="http://schemas.openxmlformats.org/drawingml/2006/main" xmlns:p="http://schemas.openxmlformats.org/presentationml/2006/main" xmlns:r="http://schemas.openxmlformats.org/officeDocument/2006/relationships">
+<p:notes xmlns:a="http://schemas.openxmlformats.org/drawingml/2006/main" xmlns:r="http://schemas.openxmlformats.org/officeDocument/2006/relationships" xmlns:p="http://schemas.openxmlformats.org/presentationml/2006/main">
   <p:cSld>
     <p:spTree>
       <p:nvGrpSpPr>
@@ -638,7 +790,7 @@
         <p:nvSpPr>
           <p:cNvPr id="2" name="Slide Image Placeholder 1"/>
           <p:cNvSpPr>
-            <a:spLocks noGrp="1"/>
+            <a:spLocks noGrp="1" noRot="1" noChangeAspect="1"/>
           </p:cNvSpPr>
           <p:nvPr>
             <p:ph type="sldImg" idx="2"/>
@@ -653,7 +805,7 @@
             <a:spLocks noGrp="1"/>
           </p:cNvSpPr>
           <p:nvPr>
-            <p:ph type="body" idx="3" sz="quarter"/>
+            <p:ph type="body" sz="quarter" idx="3"/>
           </p:nvPr>
         </p:nvSpPr>
         <p:spPr/>
@@ -679,7 +831,7 @@
             <a:spLocks noGrp="1"/>
           </p:cNvSpPr>
           <p:nvPr>
-            <p:ph type="sldNum" idx="5" sz="quarter"/>
+            <p:ph type="sldNum" sz="quarter" idx="5"/>
           </p:nvPr>
         </p:nvSpPr>
         <p:spPr/>
@@ -693,7 +845,7 @@
 </file>
 
 <file path=ppt/notesSlides/notesSlide12.xml><?xml version="1.0" encoding="utf-8"?>
-<p:notes xmlns:a="http://schemas.openxmlformats.org/drawingml/2006/main" xmlns:p="http://schemas.openxmlformats.org/presentationml/2006/main" xmlns:r="http://schemas.openxmlformats.org/officeDocument/2006/relationships">
+<p:notes xmlns:a="http://schemas.openxmlformats.org/drawingml/2006/main" xmlns:r="http://schemas.openxmlformats.org/officeDocument/2006/relationships" xmlns:p="http://schemas.openxmlformats.org/presentationml/2006/main">
   <p:cSld>
     <p:spTree>
       <p:nvGrpSpPr>
@@ -713,7 +865,7 @@
         <p:nvSpPr>
           <p:cNvPr id="2" name="Slide Image Placeholder 1"/>
           <p:cNvSpPr>
-            <a:spLocks noGrp="1"/>
+            <a:spLocks noGrp="1" noRot="1" noChangeAspect="1"/>
           </p:cNvSpPr>
           <p:nvPr>
             <p:ph type="sldImg" idx="2"/>
@@ -728,7 +880,7 @@
             <a:spLocks noGrp="1"/>
           </p:cNvSpPr>
           <p:nvPr>
-            <p:ph type="body" idx="3" sz="quarter"/>
+            <p:ph type="body" sz="quarter" idx="3"/>
           </p:nvPr>
         </p:nvSpPr>
         <p:spPr/>
@@ -754,7 +906,7 @@
             <a:spLocks noGrp="1"/>
           </p:cNvSpPr>
           <p:nvPr>
-            <p:ph type="sldNum" idx="5" sz="quarter"/>
+            <p:ph type="sldNum" sz="quarter" idx="5"/>
           </p:nvPr>
         </p:nvSpPr>
         <p:spPr/>
@@ -768,7 +920,7 @@
 </file>
 
 <file path=ppt/notesSlides/notesSlide2.xml><?xml version="1.0" encoding="utf-8"?>
-<p:notes xmlns:a="http://schemas.openxmlformats.org/drawingml/2006/main" xmlns:p="http://schemas.openxmlformats.org/presentationml/2006/main" xmlns:r="http://schemas.openxmlformats.org/officeDocument/2006/relationships">
+<p:notes xmlns:a="http://schemas.openxmlformats.org/drawingml/2006/main" xmlns:r="http://schemas.openxmlformats.org/officeDocument/2006/relationships" xmlns:p="http://schemas.openxmlformats.org/presentationml/2006/main">
   <p:cSld>
     <p:spTree>
       <p:nvGrpSpPr>
@@ -788,7 +940,7 @@
         <p:nvSpPr>
           <p:cNvPr id="2" name="Slide Image Placeholder 1"/>
           <p:cNvSpPr>
-            <a:spLocks noGrp="1"/>
+            <a:spLocks noGrp="1" noRot="1" noChangeAspect="1"/>
           </p:cNvSpPr>
           <p:nvPr>
             <p:ph type="sldImg" idx="2"/>
@@ -803,7 +955,7 @@
             <a:spLocks noGrp="1"/>
           </p:cNvSpPr>
           <p:nvPr>
-            <p:ph type="body" idx="3" sz="quarter"/>
+            <p:ph type="body" sz="quarter" idx="3"/>
           </p:nvPr>
         </p:nvSpPr>
         <p:spPr/>
@@ -829,7 +981,7 @@
             <a:spLocks noGrp="1"/>
           </p:cNvSpPr>
           <p:nvPr>
-            <p:ph type="sldNum" idx="5" sz="quarter"/>
+            <p:ph type="sldNum" sz="quarter" idx="5"/>
           </p:nvPr>
         </p:nvSpPr>
         <p:spPr/>
@@ -843,7 +995,7 @@
 </file>
 
 <file path=ppt/notesSlides/notesSlide3.xml><?xml version="1.0" encoding="utf-8"?>
-<p:notes xmlns:a="http://schemas.openxmlformats.org/drawingml/2006/main" xmlns:p="http://schemas.openxmlformats.org/presentationml/2006/main" xmlns:r="http://schemas.openxmlformats.org/officeDocument/2006/relationships">
+<p:notes xmlns:a="http://schemas.openxmlformats.org/drawingml/2006/main" xmlns:r="http://schemas.openxmlformats.org/officeDocument/2006/relationships" xmlns:p="http://schemas.openxmlformats.org/presentationml/2006/main">
   <p:cSld>
     <p:spTree>
       <p:nvGrpSpPr>
@@ -863,7 +1015,7 @@
         <p:nvSpPr>
           <p:cNvPr id="2" name="Slide Image Placeholder 1"/>
           <p:cNvSpPr>
-            <a:spLocks noGrp="1"/>
+            <a:spLocks noGrp="1" noRot="1" noChangeAspect="1"/>
           </p:cNvSpPr>
           <p:nvPr>
             <p:ph type="sldImg" idx="2"/>
@@ -878,7 +1030,7 @@
             <a:spLocks noGrp="1"/>
           </p:cNvSpPr>
           <p:nvPr>
-            <p:ph type="body" idx="3" sz="quarter"/>
+            <p:ph type="body" sz="quarter" idx="3"/>
           </p:nvPr>
         </p:nvSpPr>
         <p:spPr/>
@@ -904,7 +1056,7 @@
             <a:spLocks noGrp="1"/>
           </p:cNvSpPr>
           <p:nvPr>
-            <p:ph type="sldNum" idx="5" sz="quarter"/>
+            <p:ph type="sldNum" sz="quarter" idx="5"/>
           </p:nvPr>
         </p:nvSpPr>
         <p:spPr/>
@@ -918,7 +1070,7 @@
 </file>
 
 <file path=ppt/notesSlides/notesSlide4.xml><?xml version="1.0" encoding="utf-8"?>
-<p:notes xmlns:a="http://schemas.openxmlformats.org/drawingml/2006/main" xmlns:p="http://schemas.openxmlformats.org/presentationml/2006/main" xmlns:r="http://schemas.openxmlformats.org/officeDocument/2006/relationships">
+<p:notes xmlns:a="http://schemas.openxmlformats.org/drawingml/2006/main" xmlns:r="http://schemas.openxmlformats.org/officeDocument/2006/relationships" xmlns:p="http://schemas.openxmlformats.org/presentationml/2006/main">
   <p:cSld>
     <p:spTree>
       <p:nvGrpSpPr>
@@ -938,7 +1090,7 @@
         <p:nvSpPr>
           <p:cNvPr id="2" name="Slide Image Placeholder 1"/>
           <p:cNvSpPr>
-            <a:spLocks noGrp="1"/>
+            <a:spLocks noGrp="1" noRot="1" noChangeAspect="1"/>
           </p:cNvSpPr>
           <p:nvPr>
             <p:ph type="sldImg" idx="2"/>
@@ -953,7 +1105,7 @@
             <a:spLocks noGrp="1"/>
           </p:cNvSpPr>
           <p:nvPr>
-            <p:ph type="body" idx="3" sz="quarter"/>
+            <p:ph type="body" sz="quarter" idx="3"/>
           </p:nvPr>
         </p:nvSpPr>
         <p:spPr/>
@@ -979,7 +1131,7 @@
             <a:spLocks noGrp="1"/>
           </p:cNvSpPr>
           <p:nvPr>
-            <p:ph type="sldNum" idx="5" sz="quarter"/>
+            <p:ph type="sldNum" sz="quarter" idx="5"/>
           </p:nvPr>
         </p:nvSpPr>
         <p:spPr/>
@@ -993,7 +1145,7 @@
 </file>
 
 <file path=ppt/notesSlides/notesSlide5.xml><?xml version="1.0" encoding="utf-8"?>
-<p:notes xmlns:a="http://schemas.openxmlformats.org/drawingml/2006/main" xmlns:p="http://schemas.openxmlformats.org/presentationml/2006/main" xmlns:r="http://schemas.openxmlformats.org/officeDocument/2006/relationships">
+<p:notes xmlns:a="http://schemas.openxmlformats.org/drawingml/2006/main" xmlns:r="http://schemas.openxmlformats.org/officeDocument/2006/relationships" xmlns:p="http://schemas.openxmlformats.org/presentationml/2006/main">
   <p:cSld>
     <p:spTree>
       <p:nvGrpSpPr>
@@ -1013,7 +1165,7 @@
         <p:nvSpPr>
           <p:cNvPr id="2" name="Slide Image Placeholder 1"/>
           <p:cNvSpPr>
-            <a:spLocks noGrp="1"/>
+            <a:spLocks noGrp="1" noRot="1" noChangeAspect="1"/>
           </p:cNvSpPr>
           <p:nvPr>
             <p:ph type="sldImg" idx="2"/>
@@ -1028,7 +1180,7 @@
             <a:spLocks noGrp="1"/>
           </p:cNvSpPr>
           <p:nvPr>
-            <p:ph type="body" idx="3" sz="quarter"/>
+            <p:ph type="body" sz="quarter" idx="3"/>
           </p:nvPr>
         </p:nvSpPr>
         <p:spPr/>
@@ -1054,7 +1206,7 @@
             <a:spLocks noGrp="1"/>
           </p:cNvSpPr>
           <p:nvPr>
-            <p:ph type="sldNum" idx="5" sz="quarter"/>
+            <p:ph type="sldNum" sz="quarter" idx="5"/>
           </p:nvPr>
         </p:nvSpPr>
         <p:spPr/>
@@ -1068,7 +1220,7 @@
 </file>
 
 <file path=ppt/notesSlides/notesSlide6.xml><?xml version="1.0" encoding="utf-8"?>
-<p:notes xmlns:a="http://schemas.openxmlformats.org/drawingml/2006/main" xmlns:p="http://schemas.openxmlformats.org/presentationml/2006/main" xmlns:r="http://schemas.openxmlformats.org/officeDocument/2006/relationships">
+<p:notes xmlns:a="http://schemas.openxmlformats.org/drawingml/2006/main" xmlns:r="http://schemas.openxmlformats.org/officeDocument/2006/relationships" xmlns:p="http://schemas.openxmlformats.org/presentationml/2006/main">
   <p:cSld>
     <p:spTree>
       <p:nvGrpSpPr>
@@ -1088,7 +1240,7 @@
         <p:nvSpPr>
           <p:cNvPr id="2" name="Slide Image Placeholder 1"/>
           <p:cNvSpPr>
-            <a:spLocks noGrp="1"/>
+            <a:spLocks noGrp="1" noRot="1" noChangeAspect="1"/>
           </p:cNvSpPr>
           <p:nvPr>
             <p:ph type="sldImg" idx="2"/>
@@ -1103,7 +1255,7 @@
             <a:spLocks noGrp="1"/>
           </p:cNvSpPr>
           <p:nvPr>
-            <p:ph type="body" idx="3" sz="quarter"/>
+            <p:ph type="body" sz="quarter" idx="3"/>
           </p:nvPr>
         </p:nvSpPr>
         <p:spPr/>
@@ -1129,7 +1281,7 @@
             <a:spLocks noGrp="1"/>
           </p:cNvSpPr>
           <p:nvPr>
-            <p:ph type="sldNum" idx="5" sz="quarter"/>
+            <p:ph type="sldNum" sz="quarter" idx="5"/>
           </p:nvPr>
         </p:nvSpPr>
         <p:spPr/>
@@ -1143,7 +1295,7 @@
 </file>
 
 <file path=ppt/notesSlides/notesSlide7.xml><?xml version="1.0" encoding="utf-8"?>
-<p:notes xmlns:a="http://schemas.openxmlformats.org/drawingml/2006/main" xmlns:p="http://schemas.openxmlformats.org/presentationml/2006/main" xmlns:r="http://schemas.openxmlformats.org/officeDocument/2006/relationships">
+<p:notes xmlns:a="http://schemas.openxmlformats.org/drawingml/2006/main" xmlns:r="http://schemas.openxmlformats.org/officeDocument/2006/relationships" xmlns:p="http://schemas.openxmlformats.org/presentationml/2006/main">
   <p:cSld>
     <p:spTree>
       <p:nvGrpSpPr>
@@ -1163,7 +1315,7 @@
         <p:nvSpPr>
           <p:cNvPr id="2" name="Slide Image Placeholder 1"/>
           <p:cNvSpPr>
-            <a:spLocks noGrp="1"/>
+            <a:spLocks noGrp="1" noRot="1" noChangeAspect="1"/>
           </p:cNvSpPr>
           <p:nvPr>
             <p:ph type="sldImg" idx="2"/>
@@ -1178,7 +1330,7 @@
             <a:spLocks noGrp="1"/>
           </p:cNvSpPr>
           <p:nvPr>
-            <p:ph type="body" idx="3" sz="quarter"/>
+            <p:ph type="body" sz="quarter" idx="3"/>
           </p:nvPr>
         </p:nvSpPr>
         <p:spPr/>
@@ -1204,7 +1356,7 @@
             <a:spLocks noGrp="1"/>
           </p:cNvSpPr>
           <p:nvPr>
-            <p:ph type="sldNum" idx="5" sz="quarter"/>
+            <p:ph type="sldNum" sz="quarter" idx="5"/>
           </p:nvPr>
         </p:nvSpPr>
         <p:spPr/>
@@ -1218,7 +1370,7 @@
 </file>
 
 <file path=ppt/notesSlides/notesSlide8.xml><?xml version="1.0" encoding="utf-8"?>
-<p:notes xmlns:a="http://schemas.openxmlformats.org/drawingml/2006/main" xmlns:p="http://schemas.openxmlformats.org/presentationml/2006/main" xmlns:r="http://schemas.openxmlformats.org/officeDocument/2006/relationships">
+<p:notes xmlns:a="http://schemas.openxmlformats.org/drawingml/2006/main" xmlns:r="http://schemas.openxmlformats.org/officeDocument/2006/relationships" xmlns:p="http://schemas.openxmlformats.org/presentationml/2006/main">
   <p:cSld>
     <p:spTree>
       <p:nvGrpSpPr>
@@ -1238,7 +1390,7 @@
         <p:nvSpPr>
           <p:cNvPr id="2" name="Slide Image Placeholder 1"/>
           <p:cNvSpPr>
-            <a:spLocks noGrp="1"/>
+            <a:spLocks noGrp="1" noRot="1" noChangeAspect="1"/>
           </p:cNvSpPr>
           <p:nvPr>
             <p:ph type="sldImg" idx="2"/>
@@ -1253,7 +1405,7 @@
             <a:spLocks noGrp="1"/>
           </p:cNvSpPr>
           <p:nvPr>
-            <p:ph type="body" idx="3" sz="quarter"/>
+            <p:ph type="body" sz="quarter" idx="3"/>
           </p:nvPr>
         </p:nvSpPr>
         <p:spPr/>
@@ -1274,7 +1426,7 @@
             <a:spLocks noGrp="1"/>
           </p:cNvSpPr>
           <p:nvPr>
-            <p:ph type="sldNum" idx="5" sz="quarter"/>
+            <p:ph type="sldNum" sz="quarter" idx="5"/>
           </p:nvPr>
         </p:nvSpPr>
         <p:spPr/>
@@ -1288,7 +1440,7 @@
 </file>
 
 <file path=ppt/notesSlides/notesSlide9.xml><?xml version="1.0" encoding="utf-8"?>
-<p:notes xmlns:a="http://schemas.openxmlformats.org/drawingml/2006/main" xmlns:p="http://schemas.openxmlformats.org/presentationml/2006/main" xmlns:r="http://schemas.openxmlformats.org/officeDocument/2006/relationships">
+<p:notes xmlns:a="http://schemas.openxmlformats.org/drawingml/2006/main" xmlns:r="http://schemas.openxmlformats.org/officeDocument/2006/relationships" xmlns:p="http://schemas.openxmlformats.org/presentationml/2006/main">
   <p:cSld>
     <p:spTree>
       <p:nvGrpSpPr>
@@ -1308,7 +1460,7 @@
         <p:nvSpPr>
           <p:cNvPr id="2" name="Slide Image Placeholder 1"/>
           <p:cNvSpPr>
-            <a:spLocks noGrp="1"/>
+            <a:spLocks noGrp="1" noRot="1" noChangeAspect="1"/>
           </p:cNvSpPr>
           <p:nvPr>
             <p:ph type="sldImg" idx="2"/>
@@ -1323,7 +1475,7 @@
             <a:spLocks noGrp="1"/>
           </p:cNvSpPr>
           <p:nvPr>
-            <p:ph type="body" idx="3" sz="quarter"/>
+            <p:ph type="body" sz="quarter" idx="3"/>
           </p:nvPr>
         </p:nvSpPr>
         <p:spPr/>
@@ -1349,7 +1501,7 @@
             <a:spLocks noGrp="1"/>
           </p:cNvSpPr>
           <p:nvPr>
-            <p:ph type="sldNum" idx="5" sz="quarter"/>
+            <p:ph type="sldNum" sz="quarter" idx="5"/>
           </p:nvPr>
         </p:nvSpPr>
         <p:spPr/>
@@ -1400,10 +1552,9 @@
           <a:lstStyle/>
           <a:p>
             <a:r>
-              <a:rPr lang="en-US" smtClean="0"/>
+              <a:rPr lang="en-US"/>
               <a:t>Click to edit Master title style</a:t>
             </a:r>
-            <a:endParaRPr lang="en-US"/>
           </a:p>
         </p:txBody>
       </p:sp>
@@ -1519,10 +1670,9 @@
           </a:lstStyle>
           <a:p>
             <a:r>
-              <a:rPr lang="en-US" smtClean="0"/>
+              <a:rPr lang="en-US"/>
               <a:t>Click to edit Master subtitle style</a:t>
             </a:r>
-            <a:endParaRPr lang="en-US"/>
           </a:p>
         </p:txBody>
       </p:sp>
@@ -1543,7 +1693,7 @@
           <a:p>
             <a:fld id="{5BCAD085-E8A6-8845-BD4E-CB4CCA059FC4}" type="datetimeFigureOut">
               <a:rPr lang="en-US" smtClean="0"/>
-              <a:t>1/27/13</a:t>
+              <a:t>2/9/2026</a:t>
             </a:fld>
             <a:endParaRPr lang="en-US"/>
           </a:p>
@@ -1637,10 +1787,9 @@
           <a:lstStyle/>
           <a:p>
             <a:r>
-              <a:rPr lang="en-US" smtClean="0"/>
+              <a:rPr lang="en-US"/>
               <a:t>Click to edit Master title style</a:t>
             </a:r>
-            <a:endParaRPr lang="en-US"/>
           </a:p>
         </p:txBody>
       </p:sp>
@@ -1661,38 +1810,37 @@
           <a:p>
             <a:pPr lvl="0"/>
             <a:r>
-              <a:rPr lang="en-US" smtClean="0"/>
+              <a:rPr lang="en-US"/>
               <a:t>Click to edit Master text styles</a:t>
             </a:r>
           </a:p>
           <a:p>
             <a:pPr lvl="1"/>
             <a:r>
-              <a:rPr lang="en-US" smtClean="0"/>
+              <a:rPr lang="en-US"/>
               <a:t>Second level</a:t>
             </a:r>
           </a:p>
           <a:p>
             <a:pPr lvl="2"/>
             <a:r>
-              <a:rPr lang="en-US" smtClean="0"/>
+              <a:rPr lang="en-US"/>
               <a:t>Third level</a:t>
             </a:r>
           </a:p>
           <a:p>
             <a:pPr lvl="3"/>
             <a:r>
-              <a:rPr lang="en-US" smtClean="0"/>
+              <a:rPr lang="en-US"/>
               <a:t>Fourth level</a:t>
             </a:r>
           </a:p>
           <a:p>
             <a:pPr lvl="4"/>
             <a:r>
-              <a:rPr lang="en-US" smtClean="0"/>
+              <a:rPr lang="en-US"/>
               <a:t>Fifth level</a:t>
             </a:r>
-            <a:endParaRPr lang="en-US"/>
           </a:p>
         </p:txBody>
       </p:sp>
@@ -1713,7 +1861,7 @@
           <a:p>
             <a:fld id="{5BCAD085-E8A6-8845-BD4E-CB4CCA059FC4}" type="datetimeFigureOut">
               <a:rPr lang="en-US" smtClean="0"/>
-              <a:t>1/27/13</a:t>
+              <a:t>2/9/2026</a:t>
             </a:fld>
             <a:endParaRPr lang="en-US"/>
           </a:p>
@@ -1812,10 +1960,9 @@
           <a:lstStyle/>
           <a:p>
             <a:r>
-              <a:rPr lang="en-US" smtClean="0"/>
+              <a:rPr lang="en-US"/>
               <a:t>Click to edit Master title style</a:t>
             </a:r>
-            <a:endParaRPr lang="en-US"/>
           </a:p>
         </p:txBody>
       </p:sp>
@@ -1841,38 +1988,37 @@
           <a:p>
             <a:pPr lvl="0"/>
             <a:r>
-              <a:rPr lang="en-US" smtClean="0"/>
+              <a:rPr lang="en-US"/>
               <a:t>Click to edit Master text styles</a:t>
             </a:r>
           </a:p>
           <a:p>
             <a:pPr lvl="1"/>
             <a:r>
-              <a:rPr lang="en-US" smtClean="0"/>
+              <a:rPr lang="en-US"/>
               <a:t>Second level</a:t>
             </a:r>
           </a:p>
           <a:p>
             <a:pPr lvl="2"/>
             <a:r>
-              <a:rPr lang="en-US" smtClean="0"/>
+              <a:rPr lang="en-US"/>
               <a:t>Third level</a:t>
             </a:r>
           </a:p>
           <a:p>
             <a:pPr lvl="3"/>
             <a:r>
-              <a:rPr lang="en-US" smtClean="0"/>
+              <a:rPr lang="en-US"/>
               <a:t>Fourth level</a:t>
             </a:r>
           </a:p>
           <a:p>
             <a:pPr lvl="4"/>
             <a:r>
-              <a:rPr lang="en-US" smtClean="0"/>
+              <a:rPr lang="en-US"/>
               <a:t>Fifth level</a:t>
             </a:r>
-            <a:endParaRPr lang="en-US"/>
           </a:p>
         </p:txBody>
       </p:sp>
@@ -1893,7 +2039,7 @@
           <a:p>
             <a:fld id="{5BCAD085-E8A6-8845-BD4E-CB4CCA059FC4}" type="datetimeFigureOut">
               <a:rPr lang="en-US" smtClean="0"/>
-              <a:t>1/27/13</a:t>
+              <a:t>2/9/2026</a:t>
             </a:fld>
             <a:endParaRPr lang="en-US"/>
           </a:p>
@@ -1987,10 +2133,9 @@
           <a:lstStyle/>
           <a:p>
             <a:r>
-              <a:rPr lang="en-US" smtClean="0"/>
+              <a:rPr lang="en-US"/>
               <a:t>Click to edit Master title style</a:t>
             </a:r>
-            <a:endParaRPr lang="en-US"/>
           </a:p>
         </p:txBody>
       </p:sp>
@@ -2011,38 +2156,37 @@
           <a:p>
             <a:pPr lvl="0"/>
             <a:r>
-              <a:rPr lang="en-US" smtClean="0"/>
+              <a:rPr lang="en-US"/>
               <a:t>Click to edit Master text styles</a:t>
             </a:r>
           </a:p>
           <a:p>
             <a:pPr lvl="1"/>
             <a:r>
-              <a:rPr lang="en-US" smtClean="0"/>
+              <a:rPr lang="en-US"/>
               <a:t>Second level</a:t>
             </a:r>
           </a:p>
           <a:p>
             <a:pPr lvl="2"/>
             <a:r>
-              <a:rPr lang="en-US" smtClean="0"/>
+              <a:rPr lang="en-US"/>
               <a:t>Third level</a:t>
             </a:r>
           </a:p>
           <a:p>
             <a:pPr lvl="3"/>
             <a:r>
-              <a:rPr lang="en-US" smtClean="0"/>
+              <a:rPr lang="en-US"/>
               <a:t>Fourth level</a:t>
             </a:r>
           </a:p>
           <a:p>
             <a:pPr lvl="4"/>
             <a:r>
-              <a:rPr lang="en-US" smtClean="0"/>
+              <a:rPr lang="en-US"/>
               <a:t>Fifth level</a:t>
             </a:r>
-            <a:endParaRPr lang="en-US"/>
           </a:p>
         </p:txBody>
       </p:sp>
@@ -2063,7 +2207,7 @@
           <a:p>
             <a:fld id="{5BCAD085-E8A6-8845-BD4E-CB4CCA059FC4}" type="datetimeFigureOut">
               <a:rPr lang="en-US" smtClean="0"/>
-              <a:t>1/27/13</a:t>
+              <a:t>2/9/2026</a:t>
             </a:fld>
             <a:endParaRPr lang="en-US"/>
           </a:p>
@@ -2166,10 +2310,9 @@
           </a:lstStyle>
           <a:p>
             <a:r>
-              <a:rPr lang="en-US" smtClean="0"/>
+              <a:rPr lang="en-US"/>
               <a:t>Click to edit Master title style</a:t>
             </a:r>
-            <a:endParaRPr lang="en-US"/>
           </a:p>
         </p:txBody>
       </p:sp>
@@ -2286,7 +2429,7 @@
           <a:p>
             <a:pPr lvl="0"/>
             <a:r>
-              <a:rPr lang="en-US" smtClean="0"/>
+              <a:rPr lang="en-US"/>
               <a:t>Click to edit Master text styles</a:t>
             </a:r>
           </a:p>
@@ -2309,7 +2452,7 @@
           <a:p>
             <a:fld id="{5BCAD085-E8A6-8845-BD4E-CB4CCA059FC4}" type="datetimeFigureOut">
               <a:rPr lang="en-US" smtClean="0"/>
-              <a:t>1/27/13</a:t>
+              <a:t>2/9/2026</a:t>
             </a:fld>
             <a:endParaRPr lang="en-US"/>
           </a:p>
@@ -2403,10 +2546,9 @@
           <a:lstStyle/>
           <a:p>
             <a:r>
-              <a:rPr lang="en-US" smtClean="0"/>
+              <a:rPr lang="en-US"/>
               <a:t>Click to edit Master title style</a:t>
             </a:r>
-            <a:endParaRPr lang="en-US"/>
           </a:p>
         </p:txBody>
       </p:sp>
@@ -2460,38 +2602,37 @@
           <a:p>
             <a:pPr lvl="0"/>
             <a:r>
-              <a:rPr lang="en-US" smtClean="0"/>
+              <a:rPr lang="en-US"/>
               <a:t>Click to edit Master text styles</a:t>
             </a:r>
           </a:p>
           <a:p>
             <a:pPr lvl="1"/>
             <a:r>
-              <a:rPr lang="en-US" smtClean="0"/>
+              <a:rPr lang="en-US"/>
               <a:t>Second level</a:t>
             </a:r>
           </a:p>
           <a:p>
             <a:pPr lvl="2"/>
             <a:r>
-              <a:rPr lang="en-US" smtClean="0"/>
+              <a:rPr lang="en-US"/>
               <a:t>Third level</a:t>
             </a:r>
           </a:p>
           <a:p>
             <a:pPr lvl="3"/>
             <a:r>
-              <a:rPr lang="en-US" smtClean="0"/>
+              <a:rPr lang="en-US"/>
               <a:t>Fourth level</a:t>
             </a:r>
           </a:p>
           <a:p>
             <a:pPr lvl="4"/>
             <a:r>
-              <a:rPr lang="en-US" smtClean="0"/>
+              <a:rPr lang="en-US"/>
               <a:t>Fifth level</a:t>
             </a:r>
-            <a:endParaRPr lang="en-US"/>
           </a:p>
         </p:txBody>
       </p:sp>
@@ -2545,38 +2686,37 @@
           <a:p>
             <a:pPr lvl="0"/>
             <a:r>
-              <a:rPr lang="en-US" smtClean="0"/>
+              <a:rPr lang="en-US"/>
               <a:t>Click to edit Master text styles</a:t>
             </a:r>
           </a:p>
           <a:p>
             <a:pPr lvl="1"/>
             <a:r>
-              <a:rPr lang="en-US" smtClean="0"/>
+              <a:rPr lang="en-US"/>
               <a:t>Second level</a:t>
             </a:r>
           </a:p>
           <a:p>
             <a:pPr lvl="2"/>
             <a:r>
-              <a:rPr lang="en-US" smtClean="0"/>
+              <a:rPr lang="en-US"/>
               <a:t>Third level</a:t>
             </a:r>
           </a:p>
           <a:p>
             <a:pPr lvl="3"/>
             <a:r>
-              <a:rPr lang="en-US" smtClean="0"/>
+              <a:rPr lang="en-US"/>
               <a:t>Fourth level</a:t>
             </a:r>
           </a:p>
           <a:p>
             <a:pPr lvl="4"/>
             <a:r>
-              <a:rPr lang="en-US" smtClean="0"/>
+              <a:rPr lang="en-US"/>
               <a:t>Fifth level</a:t>
             </a:r>
-            <a:endParaRPr lang="en-US"/>
           </a:p>
         </p:txBody>
       </p:sp>
@@ -2597,7 +2737,7 @@
           <a:p>
             <a:fld id="{5BCAD085-E8A6-8845-BD4E-CB4CCA059FC4}" type="datetimeFigureOut">
               <a:rPr lang="en-US" smtClean="0"/>
-              <a:t>1/27/13</a:t>
+              <a:t>2/9/2026</a:t>
             </a:fld>
             <a:endParaRPr lang="en-US"/>
           </a:p>
@@ -2695,10 +2835,9 @@
           </a:lstStyle>
           <a:p>
             <a:r>
-              <a:rPr lang="en-US" smtClean="0"/>
+              <a:rPr lang="en-US"/>
               <a:t>Click to edit Master title style</a:t>
             </a:r>
-            <a:endParaRPr lang="en-US"/>
           </a:p>
         </p:txBody>
       </p:sp>
@@ -2761,7 +2900,7 @@
           <a:p>
             <a:pPr lvl="0"/>
             <a:r>
-              <a:rPr lang="en-US" smtClean="0"/>
+              <a:rPr lang="en-US"/>
               <a:t>Click to edit Master text styles</a:t>
             </a:r>
           </a:p>
@@ -2817,38 +2956,37 @@
           <a:p>
             <a:pPr lvl="0"/>
             <a:r>
-              <a:rPr lang="en-US" smtClean="0"/>
+              <a:rPr lang="en-US"/>
               <a:t>Click to edit Master text styles</a:t>
             </a:r>
           </a:p>
           <a:p>
             <a:pPr lvl="1"/>
             <a:r>
-              <a:rPr lang="en-US" smtClean="0"/>
+              <a:rPr lang="en-US"/>
               <a:t>Second level</a:t>
             </a:r>
           </a:p>
           <a:p>
             <a:pPr lvl="2"/>
             <a:r>
-              <a:rPr lang="en-US" smtClean="0"/>
+              <a:rPr lang="en-US"/>
               <a:t>Third level</a:t>
             </a:r>
           </a:p>
           <a:p>
             <a:pPr lvl="3"/>
             <a:r>
-              <a:rPr lang="en-US" smtClean="0"/>
+              <a:rPr lang="en-US"/>
               <a:t>Fourth level</a:t>
             </a:r>
           </a:p>
           <a:p>
             <a:pPr lvl="4"/>
             <a:r>
-              <a:rPr lang="en-US" smtClean="0"/>
+              <a:rPr lang="en-US"/>
               <a:t>Fifth level</a:t>
             </a:r>
-            <a:endParaRPr lang="en-US"/>
           </a:p>
         </p:txBody>
       </p:sp>
@@ -2911,7 +3049,7 @@
           <a:p>
             <a:pPr lvl="0"/>
             <a:r>
-              <a:rPr lang="en-US" smtClean="0"/>
+              <a:rPr lang="en-US"/>
               <a:t>Click to edit Master text styles</a:t>
             </a:r>
           </a:p>
@@ -2967,38 +3105,37 @@
           <a:p>
             <a:pPr lvl="0"/>
             <a:r>
-              <a:rPr lang="en-US" smtClean="0"/>
+              <a:rPr lang="en-US"/>
               <a:t>Click to edit Master text styles</a:t>
             </a:r>
           </a:p>
           <a:p>
             <a:pPr lvl="1"/>
             <a:r>
-              <a:rPr lang="en-US" smtClean="0"/>
+              <a:rPr lang="en-US"/>
               <a:t>Second level</a:t>
             </a:r>
           </a:p>
           <a:p>
             <a:pPr lvl="2"/>
             <a:r>
-              <a:rPr lang="en-US" smtClean="0"/>
+              <a:rPr lang="en-US"/>
               <a:t>Third level</a:t>
             </a:r>
           </a:p>
           <a:p>
             <a:pPr lvl="3"/>
             <a:r>
-              <a:rPr lang="en-US" smtClean="0"/>
+              <a:rPr lang="en-US"/>
               <a:t>Fourth level</a:t>
             </a:r>
           </a:p>
           <a:p>
             <a:pPr lvl="4"/>
             <a:r>
-              <a:rPr lang="en-US" smtClean="0"/>
+              <a:rPr lang="en-US"/>
               <a:t>Fifth level</a:t>
             </a:r>
-            <a:endParaRPr lang="en-US"/>
           </a:p>
         </p:txBody>
       </p:sp>
@@ -3019,7 +3156,7 @@
           <a:p>
             <a:fld id="{5BCAD085-E8A6-8845-BD4E-CB4CCA059FC4}" type="datetimeFigureOut">
               <a:rPr lang="en-US" smtClean="0"/>
-              <a:t>1/27/13</a:t>
+              <a:t>2/9/2026</a:t>
             </a:fld>
             <a:endParaRPr lang="en-US"/>
           </a:p>
@@ -3113,10 +3250,9 @@
           <a:lstStyle/>
           <a:p>
             <a:r>
-              <a:rPr lang="en-US" smtClean="0"/>
+              <a:rPr lang="en-US"/>
               <a:t>Click to edit Master title style</a:t>
             </a:r>
-            <a:endParaRPr lang="en-US"/>
           </a:p>
         </p:txBody>
       </p:sp>
@@ -3137,7 +3273,7 @@
           <a:p>
             <a:fld id="{5BCAD085-E8A6-8845-BD4E-CB4CCA059FC4}" type="datetimeFigureOut">
               <a:rPr lang="en-US" smtClean="0"/>
-              <a:t>1/27/13</a:t>
+              <a:t>2/9/2026</a:t>
             </a:fld>
             <a:endParaRPr lang="en-US"/>
           </a:p>
@@ -3232,7 +3368,7 @@
           <a:p>
             <a:fld id="{5BCAD085-E8A6-8845-BD4E-CB4CCA059FC4}" type="datetimeFigureOut">
               <a:rPr lang="en-US" smtClean="0"/>
-              <a:t>1/27/13</a:t>
+              <a:t>2/9/2026</a:t>
             </a:fld>
             <a:endParaRPr lang="en-US"/>
           </a:p>
@@ -3335,10 +3471,9 @@
           </a:lstStyle>
           <a:p>
             <a:r>
-              <a:rPr lang="en-US" smtClean="0"/>
+              <a:rPr lang="en-US"/>
               <a:t>Click to edit Master title style</a:t>
             </a:r>
-            <a:endParaRPr lang="en-US"/>
           </a:p>
         </p:txBody>
       </p:sp>
@@ -3392,38 +3527,37 @@
           <a:p>
             <a:pPr lvl="0"/>
             <a:r>
-              <a:rPr lang="en-US" smtClean="0"/>
+              <a:rPr lang="en-US"/>
               <a:t>Click to edit Master text styles</a:t>
             </a:r>
           </a:p>
           <a:p>
             <a:pPr lvl="1"/>
             <a:r>
-              <a:rPr lang="en-US" smtClean="0"/>
+              <a:rPr lang="en-US"/>
               <a:t>Second level</a:t>
             </a:r>
           </a:p>
           <a:p>
             <a:pPr lvl="2"/>
             <a:r>
-              <a:rPr lang="en-US" smtClean="0"/>
+              <a:rPr lang="en-US"/>
               <a:t>Third level</a:t>
             </a:r>
           </a:p>
           <a:p>
             <a:pPr lvl="3"/>
             <a:r>
-              <a:rPr lang="en-US" smtClean="0"/>
+              <a:rPr lang="en-US"/>
               <a:t>Fourth level</a:t>
             </a:r>
           </a:p>
           <a:p>
             <a:pPr lvl="4"/>
             <a:r>
-              <a:rPr lang="en-US" smtClean="0"/>
+              <a:rPr lang="en-US"/>
               <a:t>Fifth level</a:t>
             </a:r>
-            <a:endParaRPr lang="en-US"/>
           </a:p>
         </p:txBody>
       </p:sp>
@@ -3486,7 +3620,7 @@
           <a:p>
             <a:pPr lvl="0"/>
             <a:r>
-              <a:rPr lang="en-US" smtClean="0"/>
+              <a:rPr lang="en-US"/>
               <a:t>Click to edit Master text styles</a:t>
             </a:r>
           </a:p>
@@ -3509,7 +3643,7 @@
           <a:p>
             <a:fld id="{5BCAD085-E8A6-8845-BD4E-CB4CCA059FC4}" type="datetimeFigureOut">
               <a:rPr lang="en-US" smtClean="0"/>
-              <a:t>1/27/13</a:t>
+              <a:t>2/9/2026</a:t>
             </a:fld>
             <a:endParaRPr lang="en-US"/>
           </a:p>
@@ -3612,10 +3746,9 @@
           </a:lstStyle>
           <a:p>
             <a:r>
-              <a:rPr lang="en-US" smtClean="0"/>
+              <a:rPr lang="en-US"/>
               <a:t>Click to edit Master title style</a:t>
             </a:r>
-            <a:endParaRPr lang="en-US"/>
           </a:p>
         </p:txBody>
       </p:sp>
@@ -3739,7 +3872,7 @@
           <a:p>
             <a:pPr lvl="0"/>
             <a:r>
-              <a:rPr lang="en-US" smtClean="0"/>
+              <a:rPr lang="en-US"/>
               <a:t>Click to edit Master text styles</a:t>
             </a:r>
           </a:p>
@@ -3762,7 +3895,7 @@
           <a:p>
             <a:fld id="{5BCAD085-E8A6-8845-BD4E-CB4CCA059FC4}" type="datetimeFigureOut">
               <a:rPr lang="en-US" smtClean="0"/>
-              <a:t>1/27/13</a:t>
+              <a:t>2/9/2026</a:t>
             </a:fld>
             <a:endParaRPr lang="en-US"/>
           </a:p>
@@ -3871,10 +4004,9 @@
           <a:lstStyle/>
           <a:p>
             <a:r>
-              <a:rPr lang="en-US" smtClean="0"/>
+              <a:rPr lang="en-US"/>
               <a:t>Click to edit Master title style</a:t>
             </a:r>
-            <a:endParaRPr lang="en-US"/>
           </a:p>
         </p:txBody>
       </p:sp>
@@ -3905,38 +4037,37 @@
           <a:p>
             <a:pPr lvl="0"/>
             <a:r>
-              <a:rPr lang="en-US" smtClean="0"/>
+              <a:rPr lang="en-US"/>
               <a:t>Click to edit Master text styles</a:t>
             </a:r>
           </a:p>
           <a:p>
             <a:pPr lvl="1"/>
             <a:r>
-              <a:rPr lang="en-US" smtClean="0"/>
+              <a:rPr lang="en-US"/>
               <a:t>Second level</a:t>
             </a:r>
           </a:p>
           <a:p>
             <a:pPr lvl="2"/>
             <a:r>
-              <a:rPr lang="en-US" smtClean="0"/>
+              <a:rPr lang="en-US"/>
               <a:t>Third level</a:t>
             </a:r>
           </a:p>
           <a:p>
             <a:pPr lvl="3"/>
             <a:r>
-              <a:rPr lang="en-US" smtClean="0"/>
+              <a:rPr lang="en-US"/>
               <a:t>Fourth level</a:t>
             </a:r>
           </a:p>
           <a:p>
             <a:pPr lvl="4"/>
             <a:r>
-              <a:rPr lang="en-US" smtClean="0"/>
+              <a:rPr lang="en-US"/>
               <a:t>Fifth level</a:t>
             </a:r>
-            <a:endParaRPr lang="en-US"/>
           </a:p>
         </p:txBody>
       </p:sp>
@@ -3975,7 +4106,7 @@
           <a:p>
             <a:fld id="{5BCAD085-E8A6-8845-BD4E-CB4CCA059FC4}" type="datetimeFigureOut">
               <a:rPr lang="en-US" smtClean="0"/>
-              <a:t>1/27/13</a:t>
+              <a:t>2/9/2026</a:t>
             </a:fld>
             <a:endParaRPr lang="en-US"/>
           </a:p>
@@ -4334,7 +4465,7 @@
 </file>
 
 <file path=ppt/slides/slide1.xml><?xml version="1.0" encoding="utf-8"?>
-<p:sld xmlns:a="http://schemas.openxmlformats.org/drawingml/2006/main" xmlns:p="http://schemas.openxmlformats.org/presentationml/2006/main" xmlns:r="http://schemas.openxmlformats.org/officeDocument/2006/relationships">
+<p:sld xmlns:a="http://schemas.openxmlformats.org/drawingml/2006/main" xmlns:r="http://schemas.openxmlformats.org/officeDocument/2006/relationships" xmlns:p="http://schemas.openxmlformats.org/presentationml/2006/main">
   <p:cSld>
     <p:spTree>
       <p:nvGrpSpPr>
@@ -4342,7 +4473,14 @@
         <p:cNvGrpSpPr/>
         <p:nvPr/>
       </p:nvGrpSpPr>
-      <p:grpSpPr/>
+      <p:grpSpPr>
+        <a:xfrm>
+          <a:off x="0" y="0"/>
+          <a:ext cx="0" cy="0"/>
+          <a:chOff x="0" y="0"/>
+          <a:chExt cx="0" cy="0"/>
+        </a:xfrm>
+      </p:grpSpPr>
       <p:sp>
         <p:nvSpPr>
           <p:cNvPr id="2" name="Title 1"/>
@@ -4355,7 +4493,9 @@
         </p:nvSpPr>
         <p:spPr/>
         <p:txBody>
-          <a:bodyPr/>
+          <a:bodyPr>
+            <a:normAutofit fontScale="90000"/>
+          </a:bodyPr>
           <a:lstStyle/>
           <a:p>
             <a:r>
@@ -4366,7 +4506,13 @@
       </p:sp>
       <p:sp>
         <p:nvSpPr>
-          <p:cNvPr id="3" name="Content Placeholder 2"/>
+          <p:cNvPr id="5" name="Content Placeholder 4">
+            <a:extLst>
+              <a:ext uri="{FF2B5EF4-FFF2-40B4-BE49-F238E27FC236}">
+                <a16:creationId xmlns:a16="http://schemas.microsoft.com/office/drawing/2014/main" id="{9CFFCB58-81DB-5576-C29A-2DBEF1933535}"/>
+              </a:ext>
+            </a:extLst>
+          </p:cNvPr>
           <p:cNvSpPr>
             <a:spLocks noGrp="1"/>
           </p:cNvSpPr>
@@ -4379,19 +4525,21 @@
           <a:bodyPr/>
           <a:lstStyle/>
           <a:p>
-            <a:pPr>
-              <a:defRPr sz="1800"/>
-            </a:pPr>
-            <a:r>
-              <a:t>Orchestrating Complex ML Pipelines in Production</a:t>
-            </a:r>
-          </a:p>
-          <a:p>
-            <a:pPr>
-              <a:defRPr sz="1800"/>
-            </a:pPr>
-            <a:r>
-              <a:t>Scale or Fail (MVP Workshop)</a:t>
+            <a:r>
+              <a:rPr lang="en-GB" dirty="0"/>
+              <a:t>Safeguarding contact details</a:t>
+            </a:r>
+          </a:p>
+          <a:p>
+            <a:r>
+              <a:rPr lang="en-GB" dirty="0"/>
+              <a:t>Reminder about British Values and Prevent</a:t>
+            </a:r>
+          </a:p>
+          <a:p>
+            <a:r>
+              <a:rPr lang="en-GB" dirty="0"/>
+              <a:t>Wellbeing check</a:t>
             </a:r>
           </a:p>
         </p:txBody>
@@ -4405,7 +4553,7 @@
 </file>
 
 <file path=ppt/slides/slide10.xml><?xml version="1.0" encoding="utf-8"?>
-<p:sld xmlns:a="http://schemas.openxmlformats.org/drawingml/2006/main" xmlns:p="http://schemas.openxmlformats.org/presentationml/2006/main" xmlns:r="http://schemas.openxmlformats.org/officeDocument/2006/relationships">
+<p:sld xmlns:a="http://schemas.openxmlformats.org/drawingml/2006/main" xmlns:r="http://schemas.openxmlformats.org/officeDocument/2006/relationships" xmlns:p="http://schemas.openxmlformats.org/presentationml/2006/main">
   <p:cSld>
     <p:spTree>
       <p:nvGrpSpPr>
@@ -4413,7 +4561,14 @@
         <p:cNvGrpSpPr/>
         <p:nvPr/>
       </p:nvGrpSpPr>
-      <p:grpSpPr/>
+      <p:grpSpPr>
+        <a:xfrm>
+          <a:off x="0" y="0"/>
+          <a:ext cx="0" cy="0"/>
+          <a:chOff x="0" y="0"/>
+          <a:chExt cx="0" cy="0"/>
+        </a:xfrm>
+      </p:grpSpPr>
       <p:sp>
         <p:nvSpPr>
           <p:cNvPr id="2" name="Title 1"/>
@@ -4430,7 +4585,8 @@
           <a:lstStyle/>
           <a:p>
             <a:r>
-              <a:t>Coach “follow-me” setup (1)</a:t>
+              <a:rPr dirty="0"/>
+              <a:t>Coach “follow-me”</a:t>
             </a:r>
           </a:p>
         </p:txBody>
@@ -4454,7 +4610,12 @@
               <a:defRPr sz="1800"/>
             </a:pPr>
             <a:r>
-              <a:t>Open:</a:t>
+              <a:rPr lang="en-GB" dirty="0"/>
+              <a:t>To set-up your environment, we will do this together</a:t>
+            </a:r>
+            <a:r>
+              <a:rPr dirty="0"/>
+              <a:t>:</a:t>
             </a:r>
           </a:p>
           <a:p>
@@ -4462,54 +4623,159 @@
               <a:defRPr sz="1800"/>
             </a:pPr>
             <a:r>
-              <a:t>AWS Console (sandbox credentials)</a:t>
-            </a:r>
+              <a:rPr lang="en-GB" dirty="0"/>
+              <a:t>Open </a:t>
+            </a:r>
+            <a:r>
+              <a:rPr dirty="0"/>
+              <a:t>AWS Console </a:t>
+            </a:r>
+            <a:r>
+              <a:rPr lang="en-GB" dirty="0"/>
+              <a:t>using your </a:t>
+            </a:r>
+            <a:r>
+              <a:rPr dirty="0"/>
+              <a:t>sandbox </a:t>
+            </a:r>
+            <a:r>
+              <a:rPr lang="en-GB" dirty="0"/>
+              <a:t>log-in</a:t>
+            </a:r>
+            <a:endParaRPr dirty="0"/>
           </a:p>
           <a:p>
             <a:pPr>
               <a:defRPr sz="1800"/>
             </a:pPr>
             <a:r>
-              <a:t>Region: us-east-1</a:t>
-            </a:r>
+              <a:rPr lang="en-GB" dirty="0"/>
+              <a:t>We will try to use the r</a:t>
+            </a:r>
+            <a:r>
+              <a:rPr dirty="0" err="1"/>
+              <a:t>egion</a:t>
+            </a:r>
+            <a:r>
+              <a:rPr dirty="0"/>
+              <a:t>: us-east-1</a:t>
+            </a:r>
+            <a:r>
+              <a:rPr lang="en-GB" dirty="0"/>
+              <a:t>, unless your coach directs otherwise</a:t>
+            </a:r>
+            <a:endParaRPr dirty="0"/>
           </a:p>
           <a:p>
             <a:pPr>
               <a:defRPr sz="1800"/>
             </a:pPr>
             <a:r>
+              <a:rPr lang="en-GB" dirty="0"/>
+              <a:t>Launch </a:t>
+            </a:r>
+            <a:r>
+              <a:rPr dirty="0" err="1"/>
               <a:t>CloudShell</a:t>
             </a:r>
+            <a:endParaRPr lang="en-GB" dirty="0"/>
           </a:p>
           <a:p>
             <a:pPr>
               <a:defRPr sz="1800"/>
             </a:pPr>
             <a:r>
-              <a:t>Then run:</a:t>
-            </a:r>
+              <a:rPr lang="en-GB" dirty="0"/>
+              <a:t>Load the files from this workshop’s </a:t>
+            </a:r>
+            <a:r>
+              <a:rPr lang="en-GB" dirty="0" err="1"/>
+              <a:t>github</a:t>
+            </a:r>
+            <a:r>
+              <a:rPr lang="en-GB" dirty="0"/>
+              <a:t> repo into your environment</a:t>
+            </a:r>
+            <a:endParaRPr dirty="0"/>
           </a:p>
           <a:p>
             <a:pPr>
               <a:defRPr sz="1800"/>
             </a:pPr>
             <a:r>
-              <a:t>`chmod +x scripts/*.sh`</a:t>
-            </a:r>
-          </a:p>
-          <a:p>
-            <a:pPr>
-              <a:defRPr sz="1800"/>
-            </a:pPr>
-            <a:r>
+              <a:rPr dirty="0"/>
+              <a:t>Then</a:t>
+            </a:r>
+            <a:r>
+              <a:rPr lang="en-GB" dirty="0"/>
+              <a:t>, from the correct directory,</a:t>
+            </a:r>
+            <a:r>
+              <a:rPr dirty="0"/>
+              <a:t> run:</a:t>
+            </a:r>
+          </a:p>
+          <a:p>
+            <a:pPr lvl="1">
+              <a:defRPr sz="1800"/>
+            </a:pPr>
+            <a:r>
+              <a:rPr dirty="0">
+                <a:latin typeface="Courier New" panose="02070309020205020404" pitchFamily="49" charset="0"/>
+                <a:cs typeface="Courier New" panose="02070309020205020404" pitchFamily="49" charset="0"/>
+              </a:rPr>
+              <a:t>`</a:t>
+            </a:r>
+            <a:r>
+              <a:rPr dirty="0" err="1">
+                <a:latin typeface="Courier New" panose="02070309020205020404" pitchFamily="49" charset="0"/>
+                <a:cs typeface="Courier New" panose="02070309020205020404" pitchFamily="49" charset="0"/>
+              </a:rPr>
+              <a:t>chmod</a:t>
+            </a:r>
+            <a:r>
+              <a:rPr dirty="0">
+                <a:latin typeface="Courier New" panose="02070309020205020404" pitchFamily="49" charset="0"/>
+                <a:cs typeface="Courier New" panose="02070309020205020404" pitchFamily="49" charset="0"/>
+              </a:rPr>
+              <a:t> +x scripts/*.</a:t>
+            </a:r>
+            <a:r>
+              <a:rPr dirty="0" err="1">
+                <a:latin typeface="Courier New" panose="02070309020205020404" pitchFamily="49" charset="0"/>
+                <a:cs typeface="Courier New" panose="02070309020205020404" pitchFamily="49" charset="0"/>
+              </a:rPr>
+              <a:t>sh</a:t>
+            </a:r>
+            <a:r>
+              <a:rPr dirty="0">
+                <a:latin typeface="Courier New" panose="02070309020205020404" pitchFamily="49" charset="0"/>
+                <a:cs typeface="Courier New" panose="02070309020205020404" pitchFamily="49" charset="0"/>
+              </a:rPr>
+              <a:t>`</a:t>
+            </a:r>
+          </a:p>
+          <a:p>
+            <a:pPr lvl="1">
+              <a:defRPr sz="1800"/>
+            </a:pPr>
+            <a:r>
+              <a:rPr dirty="0">
+                <a:latin typeface="Courier New" panose="02070309020205020404" pitchFamily="49" charset="0"/>
+                <a:cs typeface="Courier New" panose="02070309020205020404" pitchFamily="49" charset="0"/>
+              </a:rPr>
               <a:t>`./scripts/00_set_region.sh`</a:t>
             </a:r>
           </a:p>
           <a:p>
-            <a:pPr>
-              <a:defRPr sz="1800"/>
-            </a:pPr>
-            <a:r>
+            <a:pPr lvl="1">
+              <a:defRPr sz="1800"/>
+            </a:pPr>
+            <a:r>
+              <a:rPr dirty="0">
+                <a:latin typeface="Courier New" panose="02070309020205020404" pitchFamily="49" charset="0"/>
+                <a:cs typeface="Courier New" panose="02070309020205020404" pitchFamily="49" charset="0"/>
+              </a:rPr>
               <a:t>`./scripts/01_deploy.sh`</a:t>
             </a:r>
           </a:p>
@@ -4524,7 +4790,7 @@
 </file>
 
 <file path=ppt/slides/slide11.xml><?xml version="1.0" encoding="utf-8"?>
-<p:sld xmlns:a="http://schemas.openxmlformats.org/drawingml/2006/main" xmlns:p="http://schemas.openxmlformats.org/presentationml/2006/main" xmlns:r="http://schemas.openxmlformats.org/officeDocument/2006/relationships">
+<p:sld xmlns:a="http://schemas.openxmlformats.org/drawingml/2006/main" xmlns:r="http://schemas.openxmlformats.org/officeDocument/2006/relationships" xmlns:p="http://schemas.openxmlformats.org/presentationml/2006/main">
   <p:cSld>
     <p:spTree>
       <p:nvGrpSpPr>
@@ -4532,7 +4798,14 @@
         <p:cNvGrpSpPr/>
         <p:nvPr/>
       </p:nvGrpSpPr>
-      <p:grpSpPr/>
+      <p:grpSpPr>
+        <a:xfrm>
+          <a:off x="0" y="0"/>
+          <a:ext cx="0" cy="0"/>
+          <a:chOff x="0" y="0"/>
+          <a:chExt cx="0" cy="0"/>
+        </a:xfrm>
+      </p:grpSpPr>
       <p:sp>
         <p:nvSpPr>
           <p:cNvPr id="2" name="Title 1"/>
@@ -4549,7 +4822,8 @@
           <a:lstStyle/>
           <a:p>
             <a:r>
-              <a:t>Coach “follow-me” setup (2)</a:t>
+              <a:rPr dirty="0"/>
+              <a:t>Coach “follow-me”</a:t>
             </a:r>
           </a:p>
         </p:txBody>
@@ -4573,22 +4847,36 @@
               <a:defRPr sz="1800"/>
             </a:pPr>
             <a:r>
-              <a:t>Show learners where to find:</a:t>
-            </a:r>
+              <a:rPr lang="en-GB" dirty="0"/>
+              <a:t>Your coach will now show you</a:t>
+            </a:r>
+            <a:r>
+              <a:rPr dirty="0"/>
+              <a:t> where to find:</a:t>
+            </a:r>
+            <a:endParaRPr lang="en-GB" dirty="0"/>
           </a:p>
           <a:p>
             <a:pPr>
               <a:defRPr sz="1800"/>
             </a:pPr>
-            <a:r>
+            <a:endParaRPr dirty="0"/>
+          </a:p>
+          <a:p>
+            <a:pPr lvl="1">
+              <a:defRPr sz="1800"/>
+            </a:pPr>
+            <a:r>
+              <a:rPr dirty="0"/>
               <a:t>Step Functions → State machines → AI6-Unit5W-ScaleOrFail-state-machine</a:t>
             </a:r>
           </a:p>
           <a:p>
-            <a:pPr>
-              <a:defRPr sz="1800"/>
-            </a:pPr>
-            <a:r>
+            <a:pPr lvl="1">
+              <a:defRPr sz="1800"/>
+            </a:pPr>
+            <a:r>
+              <a:rPr dirty="0"/>
               <a:t>CloudWatch → Dashboards → AI6-Unit5W-ScaleOrFail-dashboard</a:t>
             </a:r>
           </a:p>
@@ -4603,7 +4891,7 @@
 </file>
 
 <file path=ppt/slides/slide12.xml><?xml version="1.0" encoding="utf-8"?>
-<p:sld xmlns:a="http://schemas.openxmlformats.org/drawingml/2006/main" xmlns:p="http://schemas.openxmlformats.org/presentationml/2006/main" xmlns:r="http://schemas.openxmlformats.org/officeDocument/2006/relationships">
+<p:sld xmlns:a="http://schemas.openxmlformats.org/drawingml/2006/main" xmlns:r="http://schemas.openxmlformats.org/officeDocument/2006/relationships" xmlns:p="http://schemas.openxmlformats.org/presentationml/2006/main">
   <p:cSld>
     <p:spTree>
       <p:nvGrpSpPr>
@@ -4611,7 +4899,14 @@
         <p:cNvGrpSpPr/>
         <p:nvPr/>
       </p:nvGrpSpPr>
-      <p:grpSpPr/>
+      <p:grpSpPr>
+        <a:xfrm>
+          <a:off x="0" y="0"/>
+          <a:ext cx="0" cy="0"/>
+          <a:chOff x="0" y="0"/>
+          <a:chExt cx="0" cy="0"/>
+        </a:xfrm>
+      </p:grpSpPr>
       <p:sp>
         <p:nvSpPr>
           <p:cNvPr id="2" name="Title 1"/>
@@ -4652,39 +4947,60 @@
               <a:defRPr sz="1800"/>
             </a:pPr>
             <a:r>
+              <a:rPr dirty="0"/>
               <a:t>Run:</a:t>
             </a:r>
           </a:p>
           <a:p>
+            <a:pPr lvl="1">
+              <a:defRPr sz="1800"/>
+            </a:pPr>
+            <a:r>
+              <a:rPr dirty="0"/>
+              <a:t>`./scripts/02_invoke_one.sh`</a:t>
+            </a:r>
+          </a:p>
+          <a:p>
             <a:pPr>
               <a:defRPr sz="1800"/>
             </a:pPr>
             <a:r>
-              <a:t>`./scripts/02_invoke_one.sh`</a:t>
-            </a:r>
-          </a:p>
-          <a:p>
-            <a:pPr>
-              <a:defRPr sz="1800"/>
-            </a:pPr>
-            <a:r>
-              <a:t>What learners should see:</a:t>
-            </a:r>
-          </a:p>
-          <a:p>
-            <a:pPr>
-              <a:defRPr sz="1800"/>
-            </a:pPr>
-            <a:r>
+              <a:rPr dirty="0"/>
+              <a:t>What </a:t>
+            </a:r>
+            <a:r>
+              <a:rPr lang="en-GB" dirty="0"/>
+              <a:t>you</a:t>
+            </a:r>
+            <a:r>
+              <a:rPr dirty="0"/>
+              <a:t> should see:</a:t>
+            </a:r>
+          </a:p>
+          <a:p>
+            <a:pPr lvl="1">
+              <a:defRPr sz="1800"/>
+            </a:pPr>
+            <a:r>
+              <a:rPr dirty="0"/>
               <a:t>execution succeeds</a:t>
             </a:r>
           </a:p>
           <a:p>
-            <a:pPr>
-              <a:defRPr sz="1800"/>
-            </a:pPr>
-            <a:r>
-              <a:t>output includes `route`, `route_score`, `priority`</a:t>
+            <a:pPr lvl="1">
+              <a:defRPr sz="1800"/>
+            </a:pPr>
+            <a:r>
+              <a:rPr dirty="0"/>
+              <a:t>output includes `route`, `</a:t>
+            </a:r>
+            <a:r>
+              <a:rPr dirty="0" err="1"/>
+              <a:t>route_score</a:t>
+            </a:r>
+            <a:r>
+              <a:rPr dirty="0"/>
+              <a:t>`, `priority`</a:t>
             </a:r>
           </a:p>
         </p:txBody>
@@ -4698,7 +5014,7 @@
 </file>
 
 <file path=ppt/slides/slide13.xml><?xml version="1.0" encoding="utf-8"?>
-<p:sld xmlns:a="http://schemas.openxmlformats.org/drawingml/2006/main" xmlns:p="http://schemas.openxmlformats.org/presentationml/2006/main" xmlns:r="http://schemas.openxmlformats.org/officeDocument/2006/relationships">
+<p:sld xmlns:a="http://schemas.openxmlformats.org/drawingml/2006/main" xmlns:r="http://schemas.openxmlformats.org/officeDocument/2006/relationships" xmlns:p="http://schemas.openxmlformats.org/presentationml/2006/main">
   <p:cSld>
     <p:spTree>
       <p:nvGrpSpPr>
@@ -4706,7 +5022,14 @@
         <p:cNvGrpSpPr/>
         <p:nvPr/>
       </p:nvGrpSpPr>
-      <p:grpSpPr/>
+      <p:grpSpPr>
+        <a:xfrm>
+          <a:off x="0" y="0"/>
+          <a:ext cx="0" cy="0"/>
+          <a:chOff x="0" y="0"/>
+          <a:chExt cx="0" cy="0"/>
+        </a:xfrm>
+      </p:grpSpPr>
       <p:sp>
         <p:nvSpPr>
           <p:cNvPr id="2" name="Title 1"/>
@@ -4719,11 +5042,22 @@
         </p:nvSpPr>
         <p:spPr/>
         <p:txBody>
-          <a:bodyPr/>
-          <a:lstStyle/>
-          <a:p>
-            <a:r>
-              <a:t>Activity 1 (pairs): Find the “model step”</a:t>
+          <a:bodyPr>
+            <a:normAutofit/>
+          </a:bodyPr>
+          <a:lstStyle/>
+          <a:p>
+            <a:r>
+              <a:rPr dirty="0"/>
+              <a:t>Activity 1 (</a:t>
+            </a:r>
+            <a:r>
+              <a:rPr lang="en-GB" dirty="0"/>
+              <a:t>suggested in </a:t>
+            </a:r>
+            <a:r>
+              <a:rPr dirty="0"/>
+              <a:t>pairs)</a:t>
             </a:r>
           </a:p>
         </p:txBody>
@@ -4747,30 +5081,61 @@
               <a:defRPr sz="1800"/>
             </a:pPr>
             <a:r>
-              <a:t>Prompt:</a:t>
-            </a:r>
+              <a:rPr lang="en-GB" dirty="0"/>
+              <a:t>Find the “model step”</a:t>
+            </a:r>
+          </a:p>
+          <a:p>
+            <a:pPr lvl="1">
+              <a:defRPr sz="1800"/>
+            </a:pPr>
+            <a:r>
+              <a:rPr dirty="0"/>
+              <a:t>In the Step Functions execution graph, identify the step that represents “the model”</a:t>
+            </a:r>
+            <a:endParaRPr lang="en-GB" dirty="0"/>
+          </a:p>
+          <a:p>
+            <a:pPr lvl="1">
+              <a:defRPr sz="1800"/>
+            </a:pPr>
+            <a:endParaRPr lang="en-GB" dirty="0"/>
+          </a:p>
+          <a:p>
+            <a:pPr lvl="1">
+              <a:defRPr sz="1800"/>
+            </a:pPr>
+            <a:endParaRPr dirty="0"/>
           </a:p>
           <a:p>
             <a:pPr>
               <a:defRPr sz="1800"/>
             </a:pPr>
             <a:r>
-              <a:t>In the Step Functions execution graph, identify the step that represents “the model”.</a:t>
-            </a:r>
+              <a:rPr dirty="0"/>
+              <a:t>In CloudWatch dashboard, find its Duration p95 chart.</a:t>
+            </a:r>
+            <a:endParaRPr lang="en-GB" dirty="0"/>
           </a:p>
           <a:p>
             <a:pPr>
               <a:defRPr sz="1800"/>
             </a:pPr>
-            <a:r>
-              <a:t>In CloudWatch dashboard, find its Duration p95 chart.</a:t>
-            </a:r>
+            <a:endParaRPr lang="en-GB" dirty="0"/>
           </a:p>
           <a:p>
             <a:pPr>
               <a:defRPr sz="1800"/>
             </a:pPr>
-            <a:r>
+            <a:endParaRPr dirty="0"/>
+          </a:p>
+          <a:p>
+            <a:pPr marL="0" indent="0">
+              <a:buNone/>
+              <a:defRPr sz="1800"/>
+            </a:pPr>
+            <a:r>
+              <a:rPr dirty="0"/>
               <a:t>Output:</a:t>
             </a:r>
           </a:p>
@@ -4779,14 +5144,32 @@
               <a:defRPr sz="1800"/>
             </a:pPr>
             <a:r>
-              <a:t>Each pair writes one sentence:</a:t>
-            </a:r>
-          </a:p>
-          <a:p>
-            <a:pPr>
-              <a:defRPr sz="1800"/>
-            </a:pPr>
-            <a:r>
+              <a:rPr dirty="0"/>
+              <a:t>Each </a:t>
+            </a:r>
+            <a:r>
+              <a:rPr lang="en-GB" dirty="0"/>
+              <a:t>participant (</a:t>
+            </a:r>
+            <a:r>
+              <a:rPr dirty="0"/>
+              <a:t>pair</a:t>
+            </a:r>
+            <a:r>
+              <a:rPr lang="en-GB" dirty="0"/>
+              <a:t>)</a:t>
+            </a:r>
+            <a:r>
+              <a:rPr dirty="0"/>
+              <a:t> writes one sentence:</a:t>
+            </a:r>
+          </a:p>
+          <a:p>
+            <a:pPr lvl="1">
+              <a:defRPr sz="1800"/>
+            </a:pPr>
+            <a:r>
+              <a:rPr i="1" dirty="0"/>
               <a:t>“The model step is ___ because ___ evidence.”</a:t>
             </a:r>
           </a:p>
@@ -4801,7 +5184,7 @@
 </file>
 
 <file path=ppt/slides/slide14.xml><?xml version="1.0" encoding="utf-8"?>
-<p:sld xmlns:a="http://schemas.openxmlformats.org/drawingml/2006/main" xmlns:p="http://schemas.openxmlformats.org/presentationml/2006/main" xmlns:r="http://schemas.openxmlformats.org/officeDocument/2006/relationships">
+<p:sld xmlns:a="http://schemas.openxmlformats.org/drawingml/2006/main" xmlns:r="http://schemas.openxmlformats.org/officeDocument/2006/relationships" xmlns:p="http://schemas.openxmlformats.org/presentationml/2006/main">
   <p:cSld>
     <p:spTree>
       <p:nvGrpSpPr>
@@ -4809,7 +5192,14 @@
         <p:cNvGrpSpPr/>
         <p:nvPr/>
       </p:nvGrpSpPr>
-      <p:grpSpPr/>
+      <p:grpSpPr>
+        <a:xfrm>
+          <a:off x="0" y="0"/>
+          <a:ext cx="0" cy="0"/>
+          <a:chOff x="0" y="0"/>
+          <a:chExt cx="0" cy="0"/>
+        </a:xfrm>
+      </p:grpSpPr>
       <p:sp>
         <p:nvSpPr>
           <p:cNvPr id="2" name="Title 1"/>
@@ -4846,11 +5236,39 @@
           <a:bodyPr/>
           <a:lstStyle/>
           <a:p>
+            <a:pPr marL="0" indent="0">
+              <a:buNone/>
+              <a:defRPr sz="1800"/>
+            </a:pPr>
+            <a:r>
+              <a:rPr dirty="0"/>
+              <a:t>Run:</a:t>
+            </a:r>
+          </a:p>
+          <a:p>
             <a:pPr>
               <a:defRPr sz="1800"/>
             </a:pPr>
             <a:r>
-              <a:t>Run:</a:t>
+              <a:rPr dirty="0"/>
+              <a:t>`N=40 ./scripts/03_burst_load.sh`</a:t>
+            </a:r>
+          </a:p>
+          <a:p>
+            <a:pPr marL="0" indent="0">
+              <a:buNone/>
+              <a:defRPr sz="1800"/>
+            </a:pPr>
+            <a:endParaRPr lang="en-GB" dirty="0"/>
+          </a:p>
+          <a:p>
+            <a:pPr marL="0" indent="0">
+              <a:buNone/>
+              <a:defRPr sz="1800"/>
+            </a:pPr>
+            <a:r>
+              <a:rPr dirty="0"/>
+              <a:t>What learners should see (within a few minutes):</a:t>
             </a:r>
           </a:p>
           <a:p>
@@ -4858,7 +5276,8 @@
               <a:defRPr sz="1800"/>
             </a:pPr>
             <a:r>
-              <a:t>`N=40 ./scripts/03_burst_load.sh`</a:t>
+              <a:rPr dirty="0"/>
+              <a:t>Embed throttles rise</a:t>
             </a:r>
           </a:p>
           <a:p>
@@ -4866,22 +5285,7 @@
               <a:defRPr sz="1800"/>
             </a:pPr>
             <a:r>
-              <a:t>What learners should see (within a few minutes):</a:t>
-            </a:r>
-          </a:p>
-          <a:p>
-            <a:pPr>
-              <a:defRPr sz="1800"/>
-            </a:pPr>
-            <a:r>
-              <a:t>Embed throttles rise</a:t>
-            </a:r>
-          </a:p>
-          <a:p>
-            <a:pPr>
-              <a:defRPr sz="1800"/>
-            </a:pPr>
-            <a:r>
+              <a:rPr dirty="0"/>
               <a:t>Step Functions failures rise (some executions fail)</a:t>
             </a:r>
           </a:p>
@@ -4896,7 +5300,7 @@
 </file>
 
 <file path=ppt/slides/slide15.xml><?xml version="1.0" encoding="utf-8"?>
-<p:sld xmlns:a="http://schemas.openxmlformats.org/drawingml/2006/main" xmlns:p="http://schemas.openxmlformats.org/presentationml/2006/main" xmlns:r="http://schemas.openxmlformats.org/officeDocument/2006/relationships">
+<p:sld xmlns:a="http://schemas.openxmlformats.org/drawingml/2006/main" xmlns:r="http://schemas.openxmlformats.org/officeDocument/2006/relationships" xmlns:p="http://schemas.openxmlformats.org/presentationml/2006/main">
   <p:cSld>
     <p:spTree>
       <p:nvGrpSpPr>
@@ -4904,7 +5308,14 @@
         <p:cNvGrpSpPr/>
         <p:nvPr/>
       </p:nvGrpSpPr>
-      <p:grpSpPr/>
+      <p:grpSpPr>
+        <a:xfrm>
+          <a:off x="0" y="0"/>
+          <a:ext cx="0" cy="0"/>
+          <a:chOff x="0" y="0"/>
+          <a:chExt cx="0" cy="0"/>
+        </a:xfrm>
+      </p:grpSpPr>
       <p:sp>
         <p:nvSpPr>
           <p:cNvPr id="2" name="Title 1"/>
@@ -4945,48 +5356,48 @@
               <a:defRPr sz="1800"/>
             </a:pPr>
             <a:r>
-              <a:t>Ask:</a:t>
-            </a:r>
+              <a:rPr dirty="0"/>
+              <a:t>Which step was throttled?</a:t>
+            </a:r>
+            <a:endParaRPr lang="en-GB" dirty="0"/>
           </a:p>
           <a:p>
             <a:pPr>
               <a:defRPr sz="1800"/>
             </a:pPr>
-            <a:r>
-              <a:t>Which step was throttled?</a:t>
-            </a:r>
+            <a:endParaRPr dirty="0"/>
           </a:p>
           <a:p>
             <a:pPr>
               <a:defRPr sz="1800"/>
             </a:pPr>
             <a:r>
+              <a:rPr dirty="0"/>
               <a:t>Would scaling preprocess help?</a:t>
             </a:r>
+            <a:endParaRPr lang="en-GB" dirty="0"/>
           </a:p>
           <a:p>
             <a:pPr>
               <a:defRPr sz="1800"/>
             </a:pPr>
-            <a:r>
+            <a:endParaRPr dirty="0"/>
+          </a:p>
+          <a:p>
+            <a:pPr>
+              <a:defRPr sz="1800"/>
+            </a:pPr>
+            <a:r>
+              <a:rPr dirty="0"/>
               <a:t>Would scaling postprocess help?</a:t>
             </a:r>
+            <a:endParaRPr lang="en-GB" dirty="0"/>
           </a:p>
           <a:p>
             <a:pPr>
               <a:defRPr sz="1800"/>
             </a:pPr>
-            <a:r>
-              <a:t>Answer you want:</a:t>
-            </a:r>
-          </a:p>
-          <a:p>
-            <a:pPr>
-              <a:defRPr sz="1800"/>
-            </a:pPr>
-            <a:r>
-              <a:t>We scale the embed/model step first, because it is the bottleneck.</a:t>
-            </a:r>
+            <a:endParaRPr dirty="0"/>
           </a:p>
         </p:txBody>
       </p:sp>
@@ -4999,7 +5410,118 @@
 </file>
 
 <file path=ppt/slides/slide16.xml><?xml version="1.0" encoding="utf-8"?>
-<p:sld xmlns:a="http://schemas.openxmlformats.org/drawingml/2006/main" xmlns:p="http://schemas.openxmlformats.org/presentationml/2006/main" xmlns:r="http://schemas.openxmlformats.org/officeDocument/2006/relationships">
+<p:sld xmlns:a="http://schemas.openxmlformats.org/drawingml/2006/main" xmlns:r="http://schemas.openxmlformats.org/officeDocument/2006/relationships" xmlns:p="http://schemas.openxmlformats.org/presentationml/2006/main">
+  <p:cSld>
+    <p:spTree>
+      <p:nvGrpSpPr>
+        <p:cNvPr id="1" name="">
+          <a:extLst>
+            <a:ext uri="{FF2B5EF4-FFF2-40B4-BE49-F238E27FC236}">
+              <a16:creationId xmlns:a16="http://schemas.microsoft.com/office/drawing/2014/main" id="{62AC8933-578D-7630-6E42-261A80941C8F}"/>
+            </a:ext>
+          </a:extLst>
+        </p:cNvPr>
+        <p:cNvGrpSpPr/>
+        <p:nvPr/>
+      </p:nvGrpSpPr>
+      <p:grpSpPr>
+        <a:xfrm>
+          <a:off x="0" y="0"/>
+          <a:ext cx="0" cy="0"/>
+          <a:chOff x="0" y="0"/>
+          <a:chExt cx="0" cy="0"/>
+        </a:xfrm>
+      </p:grpSpPr>
+      <p:sp>
+        <p:nvSpPr>
+          <p:cNvPr id="2" name="Title 1">
+            <a:extLst>
+              <a:ext uri="{FF2B5EF4-FFF2-40B4-BE49-F238E27FC236}">
+                <a16:creationId xmlns:a16="http://schemas.microsoft.com/office/drawing/2014/main" id="{26DE937E-A242-5E28-B2B2-C01C5DBD95AE}"/>
+              </a:ext>
+            </a:extLst>
+          </p:cNvPr>
+          <p:cNvSpPr>
+            <a:spLocks noGrp="1"/>
+          </p:cNvSpPr>
+          <p:nvPr>
+            <p:ph type="title"/>
+          </p:nvPr>
+        </p:nvSpPr>
+        <p:spPr/>
+        <p:txBody>
+          <a:bodyPr/>
+          <a:lstStyle/>
+          <a:p>
+            <a:r>
+              <a:t>Mini debrief: what are we scaling?</a:t>
+            </a:r>
+          </a:p>
+        </p:txBody>
+      </p:sp>
+      <p:sp>
+        <p:nvSpPr>
+          <p:cNvPr id="3" name="Content Placeholder 2">
+            <a:extLst>
+              <a:ext uri="{FF2B5EF4-FFF2-40B4-BE49-F238E27FC236}">
+                <a16:creationId xmlns:a16="http://schemas.microsoft.com/office/drawing/2014/main" id="{50AF965A-2EB0-F397-5D1B-A03BBF88CCC7}"/>
+              </a:ext>
+            </a:extLst>
+          </p:cNvPr>
+          <p:cNvSpPr>
+            <a:spLocks noGrp="1"/>
+          </p:cNvSpPr>
+          <p:nvPr>
+            <p:ph idx="1"/>
+          </p:nvPr>
+        </p:nvSpPr>
+        <p:spPr/>
+        <p:txBody>
+          <a:bodyPr/>
+          <a:lstStyle/>
+          <a:p>
+            <a:pPr>
+              <a:defRPr sz="1800"/>
+            </a:pPr>
+            <a:endParaRPr lang="en-GB" dirty="0"/>
+          </a:p>
+          <a:p>
+            <a:pPr marL="0" indent="0">
+              <a:buNone/>
+              <a:defRPr sz="1800"/>
+            </a:pPr>
+            <a:r>
+              <a:rPr lang="en-GB" dirty="0"/>
+              <a:t>(Answer)</a:t>
+            </a:r>
+          </a:p>
+          <a:p>
+            <a:pPr>
+              <a:defRPr sz="1800"/>
+            </a:pPr>
+            <a:r>
+              <a:rPr lang="en-GB" i="1" dirty="0"/>
+              <a:t>We scale the embed/model step first, because it is the bottleneck.</a:t>
+            </a:r>
+            <a:endParaRPr i="1" dirty="0"/>
+          </a:p>
+        </p:txBody>
+      </p:sp>
+    </p:spTree>
+    <p:extLst>
+      <p:ext uri="{BB962C8B-B14F-4D97-AF65-F5344CB8AC3E}">
+        <p14:creationId xmlns:p14="http://schemas.microsoft.com/office/powerpoint/2010/main" val="716829734"/>
+      </p:ext>
+    </p:extLst>
+  </p:cSld>
+  <p:clrMapOvr>
+    <a:masterClrMapping/>
+  </p:clrMapOvr>
+</p:sld>
+</file>
+
+<file path=ppt/slides/slide17.xml><?xml version="1.0" encoding="utf-8"?>
+<p:sld xmlns:a="http://schemas.openxmlformats.org/drawingml/2006/main" xmlns:r="http://schemas.openxmlformats.org/officeDocument/2006/relationships" xmlns:p="http://schemas.openxmlformats.org/presentationml/2006/main">
   <p:cSld>
     <p:spTree>
       <p:nvGrpSpPr>
@@ -5007,7 +5529,14 @@
         <p:cNvGrpSpPr/>
         <p:nvPr/>
       </p:nvGrpSpPr>
-      <p:grpSpPr/>
+      <p:grpSpPr>
+        <a:xfrm>
+          <a:off x="0" y="0"/>
+          <a:ext cx="0" cy="0"/>
+          <a:chOff x="0" y="0"/>
+          <a:chExt cx="0" cy="0"/>
+        </a:xfrm>
+      </p:grpSpPr>
       <p:sp>
         <p:nvSpPr>
           <p:cNvPr id="2" name="Title 1"/>
@@ -5024,8 +5553,9 @@
           <a:lstStyle/>
           <a:p>
             <a:r>
-              <a:t>Lunch instructions</a:t>
-            </a:r>
+              <a:t>Lunch</a:t>
+            </a:r>
+            <a:endParaRPr dirty="0"/>
           </a:p>
         </p:txBody>
       </p:sp>
@@ -5078,7 +5608,7 @@
 </file>
 
 <file path=ppt/slides/slide2.xml><?xml version="1.0" encoding="utf-8"?>
-<p:sld xmlns:a="http://schemas.openxmlformats.org/drawingml/2006/main" xmlns:p="http://schemas.openxmlformats.org/presentationml/2006/main" xmlns:r="http://schemas.openxmlformats.org/officeDocument/2006/relationships">
+<p:sld xmlns:a="http://schemas.openxmlformats.org/drawingml/2006/main" xmlns:r="http://schemas.openxmlformats.org/officeDocument/2006/relationships" xmlns:p="http://schemas.openxmlformats.org/presentationml/2006/main">
   <p:cSld>
     <p:spTree>
       <p:nvGrpSpPr>
@@ -5086,7 +5616,14 @@
         <p:cNvGrpSpPr/>
         <p:nvPr/>
       </p:nvGrpSpPr>
-      <p:grpSpPr/>
+      <p:grpSpPr>
+        <a:xfrm>
+          <a:off x="0" y="0"/>
+          <a:ext cx="0" cy="0"/>
+          <a:chOff x="0" y="0"/>
+          <a:chExt cx="0" cy="0"/>
+        </a:xfrm>
+      </p:grpSpPr>
       <p:sp>
         <p:nvSpPr>
           <p:cNvPr id="2" name="Title 1"/>
@@ -5103,8 +5640,10 @@
           <a:lstStyle/>
           <a:p>
             <a:r>
-              <a:t>The Spine (North Star)</a:t>
-            </a:r>
+              <a:rPr lang="en-GB" dirty="0"/>
+              <a:t>The three mantras for scaling</a:t>
+            </a:r>
+            <a:endParaRPr dirty="0"/>
           </a:p>
         </p:txBody>
       </p:sp>
@@ -5120,14 +5659,21 @@
         </p:nvSpPr>
         <p:spPr/>
         <p:txBody>
-          <a:bodyPr/>
+          <a:bodyPr>
+            <a:normAutofit/>
+          </a:bodyPr>
           <a:lstStyle/>
           <a:p>
             <a:pPr>
               <a:defRPr sz="1800"/>
             </a:pPr>
             <a:r>
-              <a:t>Scaling is the job.</a:t>
+              <a:rPr sz="3600" b="1" dirty="0"/>
+              <a:t>Scaling</a:t>
+            </a:r>
+            <a:r>
+              <a:rPr sz="3600" dirty="0"/>
+              <a:t> is the job.</a:t>
             </a:r>
           </a:p>
           <a:p>
@@ -5135,7 +5681,12 @@
               <a:defRPr sz="1800"/>
             </a:pPr>
             <a:r>
-              <a:t>Orchestration is the mechanism.</a:t>
+              <a:rPr sz="3600" b="1" dirty="0"/>
+              <a:t>Orchestration</a:t>
+            </a:r>
+            <a:r>
+              <a:rPr sz="3600" dirty="0"/>
+              <a:t> is the mechanism.</a:t>
             </a:r>
           </a:p>
           <a:p>
@@ -5143,8 +5694,36 @@
               <a:defRPr sz="1800"/>
             </a:pPr>
             <a:r>
-              <a:t>Root Cause Analysis is the safety net.</a:t>
-            </a:r>
+              <a:rPr sz="3600" b="1" dirty="0"/>
+              <a:t>Root Cause Analysis </a:t>
+            </a:r>
+            <a:r>
+              <a:rPr sz="3600" dirty="0"/>
+              <a:t>is the safety net.</a:t>
+            </a:r>
+            <a:endParaRPr lang="en-GB" sz="3600" dirty="0"/>
+          </a:p>
+          <a:p>
+            <a:pPr>
+              <a:defRPr sz="1800"/>
+            </a:pPr>
+            <a:endParaRPr lang="en-GB" sz="3600" dirty="0"/>
+          </a:p>
+          <a:p>
+            <a:pPr lvl="1">
+              <a:defRPr sz="1800"/>
+            </a:pPr>
+            <a:r>
+              <a:rPr lang="en-GB" sz="3200" dirty="0"/>
+              <a:t>Don’t worry – we’ll explain </a:t>
+            </a:r>
+            <a:r>
+              <a:rPr lang="en-GB" sz="3200" dirty="0">
+                <a:sym typeface="Wingdings" panose="05000000000000000000" pitchFamily="2" charset="2"/>
+              </a:rPr>
+              <a:t></a:t>
+            </a:r>
+            <a:endParaRPr sz="3200" dirty="0"/>
           </a:p>
         </p:txBody>
       </p:sp>
@@ -5157,7 +5736,7 @@
 </file>
 
 <file path=ppt/slides/slide3.xml><?xml version="1.0" encoding="utf-8"?>
-<p:sld xmlns:a="http://schemas.openxmlformats.org/drawingml/2006/main" xmlns:p="http://schemas.openxmlformats.org/presentationml/2006/main" xmlns:r="http://schemas.openxmlformats.org/officeDocument/2006/relationships">
+<p:sld xmlns:a="http://schemas.openxmlformats.org/drawingml/2006/main" xmlns:r="http://schemas.openxmlformats.org/officeDocument/2006/relationships" xmlns:p="http://schemas.openxmlformats.org/presentationml/2006/main">
   <p:cSld>
     <p:spTree>
       <p:nvGrpSpPr>
@@ -5165,7 +5744,14 @@
         <p:cNvGrpSpPr/>
         <p:nvPr/>
       </p:nvGrpSpPr>
-      <p:grpSpPr/>
+      <p:grpSpPr>
+        <a:xfrm>
+          <a:off x="0" y="0"/>
+          <a:ext cx="0" cy="0"/>
+          <a:chOff x="0" y="0"/>
+          <a:chExt cx="0" cy="0"/>
+        </a:xfrm>
+      </p:grpSpPr>
       <p:sp>
         <p:nvSpPr>
           <p:cNvPr id="2" name="Title 1"/>
@@ -5182,7 +5768,8 @@
           <a:lstStyle/>
           <a:p>
             <a:r>
-              <a:t>Business Scenario (Low stakes, real world)</a:t>
+              <a:rPr dirty="0"/>
+              <a:t>Business Scenario</a:t>
             </a:r>
           </a:p>
         </p:txBody>
@@ -5199,21 +5786,30 @@
         </p:nvSpPr>
         <p:spPr/>
         <p:txBody>
-          <a:bodyPr/>
+          <a:bodyPr>
+            <a:normAutofit/>
+          </a:bodyPr>
           <a:lstStyle/>
           <a:p>
             <a:pPr>
               <a:defRPr sz="1800"/>
             </a:pPr>
             <a:r>
-              <a:t>“Flash Sale Friday” Support Surge</a:t>
-            </a:r>
+              <a:rPr sz="2400" b="1" dirty="0"/>
+              <a:t>“Flash Sale Friday” </a:t>
+            </a:r>
+            <a:r>
+              <a:rPr lang="en-GB" sz="2400" b="1" dirty="0"/>
+              <a:t>resulted in a surge of support tickets (helpdesk tickets)</a:t>
+            </a:r>
+            <a:endParaRPr sz="2400" b="1" dirty="0"/>
           </a:p>
           <a:p>
             <a:pPr>
               <a:defRPr sz="1800"/>
             </a:pPr>
             <a:r>
+              <a:rPr sz="2400" dirty="0"/>
               <a:t>A subscription business gets 10× more support tickets for 30 minutes.</a:t>
             </a:r>
           </a:p>
@@ -5222,46 +5818,60 @@
               <a:defRPr sz="1800"/>
             </a:pPr>
             <a:r>
+              <a:rPr sz="2400" dirty="0"/>
               <a:t>Goal:</a:t>
             </a:r>
           </a:p>
           <a:p>
-            <a:pPr>
-              <a:defRPr sz="1800"/>
-            </a:pPr>
-            <a:r>
-              <a:t>Tickets are routed automatically to the right queue:</a:t>
-            </a:r>
-          </a:p>
-          <a:p>
-            <a:pPr>
-              <a:defRPr sz="1800"/>
-            </a:pPr>
-            <a:r>
+            <a:pPr lvl="1">
+              <a:defRPr sz="1800"/>
+            </a:pPr>
+            <a:r>
+              <a:rPr sz="2400" dirty="0"/>
+              <a:t>Tickets </a:t>
+            </a:r>
+            <a:r>
+              <a:rPr lang="en-GB" sz="2400" dirty="0"/>
+              <a:t>should be</a:t>
+            </a:r>
+            <a:r>
+              <a:rPr sz="2400" dirty="0"/>
+              <a:t> routed automatically to the right queue:</a:t>
+            </a:r>
+          </a:p>
+          <a:p>
+            <a:pPr lvl="2">
+              <a:defRPr sz="1800"/>
+            </a:pPr>
+            <a:r>
+              <a:rPr dirty="0"/>
               <a:t>Billing</a:t>
             </a:r>
           </a:p>
           <a:p>
-            <a:pPr>
-              <a:defRPr sz="1800"/>
-            </a:pPr>
-            <a:r>
+            <a:pPr lvl="2">
+              <a:defRPr sz="1800"/>
+            </a:pPr>
+            <a:r>
+              <a:rPr dirty="0"/>
               <a:t>Delivery</a:t>
             </a:r>
           </a:p>
           <a:p>
-            <a:pPr>
-              <a:defRPr sz="1800"/>
-            </a:pPr>
-            <a:r>
+            <a:pPr lvl="2">
+              <a:defRPr sz="1800"/>
+            </a:pPr>
+            <a:r>
+              <a:rPr dirty="0"/>
               <a:t>Technical</a:t>
             </a:r>
           </a:p>
           <a:p>
-            <a:pPr>
-              <a:defRPr sz="1800"/>
-            </a:pPr>
-            <a:r>
+            <a:pPr lvl="2">
+              <a:defRPr sz="1800"/>
+            </a:pPr>
+            <a:r>
+              <a:rPr dirty="0"/>
               <a:t>Cancellation</a:t>
             </a:r>
           </a:p>
@@ -5276,7 +5886,7 @@
 </file>
 
 <file path=ppt/slides/slide4.xml><?xml version="1.0" encoding="utf-8"?>
-<p:sld xmlns:a="http://schemas.openxmlformats.org/drawingml/2006/main" xmlns:p="http://schemas.openxmlformats.org/presentationml/2006/main" xmlns:r="http://schemas.openxmlformats.org/officeDocument/2006/relationships">
+<p:sld xmlns:a="http://schemas.openxmlformats.org/drawingml/2006/main" xmlns:r="http://schemas.openxmlformats.org/officeDocument/2006/relationships" xmlns:p="http://schemas.openxmlformats.org/presentationml/2006/main">
   <p:cSld>
     <p:spTree>
       <p:nvGrpSpPr>
@@ -5284,7 +5894,14 @@
         <p:cNvGrpSpPr/>
         <p:nvPr/>
       </p:nvGrpSpPr>
-      <p:grpSpPr/>
+      <p:grpSpPr>
+        <a:xfrm>
+          <a:off x="0" y="0"/>
+          <a:ext cx="0" cy="0"/>
+          <a:chOff x="0" y="0"/>
+          <a:chExt cx="0" cy="0"/>
+        </a:xfrm>
+      </p:grpSpPr>
       <p:sp>
         <p:nvSpPr>
           <p:cNvPr id="2" name="Title 1"/>
@@ -5325,7 +5942,25 @@
               <a:defRPr sz="1800"/>
             </a:pPr>
             <a:r>
-              <a:t>We *reference* a real industry model choice:</a:t>
+              <a:rPr dirty="0"/>
+              <a:t>We </a:t>
+            </a:r>
+            <a:r>
+              <a:rPr i="1" dirty="0"/>
+              <a:t>reference</a:t>
+            </a:r>
+            <a:r>
+              <a:rPr dirty="0"/>
+              <a:t> a real industry model choice:</a:t>
+            </a:r>
+          </a:p>
+          <a:p>
+            <a:pPr lvl="1">
+              <a:defRPr sz="1800"/>
+            </a:pPr>
+            <a:r>
+              <a:rPr b="1" dirty="0"/>
+              <a:t>`sentence-transformers/all-MiniLM-L6-v2`</a:t>
             </a:r>
           </a:p>
           <a:p>
@@ -5333,32 +5968,52 @@
               <a:defRPr sz="1800"/>
             </a:pPr>
             <a:r>
-              <a:t>`sentence-transformers/all-MiniLM-L6-v2`</a:t>
-            </a:r>
+              <a:rPr dirty="0"/>
+              <a:t>In this workshop we use a safe, deterministic simulation that produces:</a:t>
+            </a:r>
+          </a:p>
+          <a:p>
+            <a:pPr lvl="1">
+              <a:defRPr sz="1800"/>
+            </a:pPr>
+            <a:r>
+              <a:rPr dirty="0"/>
+              <a:t>a </a:t>
+            </a:r>
+            <a:r>
+              <a:rPr dirty="0" err="1"/>
+              <a:t>MiniLM</a:t>
+            </a:r>
+            <a:r>
+              <a:rPr dirty="0"/>
+              <a:t>-style embedding shape (384 dims)</a:t>
+            </a:r>
+          </a:p>
+          <a:p>
+            <a:pPr lvl="1">
+              <a:defRPr sz="1800"/>
+            </a:pPr>
+            <a:r>
+              <a:rPr dirty="0"/>
+              <a:t>a route decision + confidence score</a:t>
+            </a:r>
+            <a:endParaRPr lang="en-GB" dirty="0"/>
+          </a:p>
+          <a:p>
+            <a:pPr lvl="1">
+              <a:defRPr sz="1800"/>
+            </a:pPr>
+            <a:endParaRPr lang="en-GB" dirty="0"/>
           </a:p>
           <a:p>
             <a:pPr>
               <a:defRPr sz="1800"/>
             </a:pPr>
             <a:r>
-              <a:t>In this workshop we use a safe, deterministic simulation that produces:</a:t>
-            </a:r>
-          </a:p>
-          <a:p>
-            <a:pPr>
-              <a:defRPr sz="1800"/>
-            </a:pPr>
-            <a:r>
-              <a:t>a MiniLM-style embedding shape (384 dims)</a:t>
-            </a:r>
-          </a:p>
-          <a:p>
-            <a:pPr>
-              <a:defRPr sz="1800"/>
-            </a:pPr>
-            <a:r>
-              <a:t>a route decision + confidence score</a:t>
-            </a:r>
+              <a:rPr lang="en-GB" dirty="0"/>
+              <a:t>Questions?</a:t>
+            </a:r>
+            <a:endParaRPr dirty="0"/>
           </a:p>
         </p:txBody>
       </p:sp>
@@ -5371,7 +6026,7 @@
 </file>
 
 <file path=ppt/slides/slide5.xml><?xml version="1.0" encoding="utf-8"?>
-<p:sld xmlns:a="http://schemas.openxmlformats.org/drawingml/2006/main" xmlns:p="http://schemas.openxmlformats.org/presentationml/2006/main" xmlns:r="http://schemas.openxmlformats.org/officeDocument/2006/relationships">
+<p:sld xmlns:a="http://schemas.openxmlformats.org/drawingml/2006/main" xmlns:r="http://schemas.openxmlformats.org/officeDocument/2006/relationships" xmlns:p="http://schemas.openxmlformats.org/presentationml/2006/main">
   <p:cSld>
     <p:spTree>
       <p:nvGrpSpPr>
@@ -5379,7 +6034,14 @@
         <p:cNvGrpSpPr/>
         <p:nvPr/>
       </p:nvGrpSpPr>
-      <p:grpSpPr/>
+      <p:grpSpPr>
+        <a:xfrm>
+          <a:off x="0" y="0"/>
+          <a:ext cx="0" cy="0"/>
+          <a:chOff x="0" y="0"/>
+          <a:chExt cx="0" cy="0"/>
+        </a:xfrm>
+      </p:grpSpPr>
       <p:sp>
         <p:nvSpPr>
           <p:cNvPr id="2" name="Title 1"/>
@@ -5396,7 +6058,8 @@
           <a:lstStyle/>
           <a:p>
             <a:r>
-              <a:t>The key teachable question</a:t>
+              <a:rPr dirty="0"/>
+              <a:t>The key question</a:t>
             </a:r>
           </a:p>
         </p:txBody>
@@ -5413,13 +6076,16 @@
         </p:nvSpPr>
         <p:spPr/>
         <p:txBody>
-          <a:bodyPr/>
+          <a:bodyPr>
+            <a:normAutofit/>
+          </a:bodyPr>
           <a:lstStyle/>
           <a:p>
             <a:pPr>
               <a:defRPr sz="1800"/>
             </a:pPr>
             <a:r>
+              <a:rPr sz="2400" b="1" dirty="0"/>
               <a:t>What are we actually scaling?</a:t>
             </a:r>
           </a:p>
@@ -5427,32 +6093,54 @@
             <a:pPr>
               <a:defRPr sz="1800"/>
             </a:pPr>
-            <a:r>
+            <a:endParaRPr lang="en-GB" sz="2400" dirty="0"/>
+          </a:p>
+          <a:p>
+            <a:pPr>
+              <a:defRPr sz="1800"/>
+            </a:pPr>
+            <a:r>
+              <a:rPr lang="en-GB" sz="2400" dirty="0"/>
+              <a:t>In any situation, ask yourself - </a:t>
+            </a:r>
+            <a:r>
+              <a:rPr sz="2400" dirty="0"/>
               <a:t>Is the bottleneck:</a:t>
             </a:r>
           </a:p>
           <a:p>
-            <a:pPr>
-              <a:defRPr sz="1800"/>
-            </a:pPr>
-            <a:r>
+            <a:pPr lvl="1">
+              <a:defRPr sz="1800"/>
+            </a:pPr>
+            <a:r>
+              <a:rPr sz="2400" dirty="0"/>
               <a:t>Pre-model (validation/cleanup)?</a:t>
             </a:r>
           </a:p>
           <a:p>
-            <a:pPr>
-              <a:defRPr sz="1800"/>
-            </a:pPr>
-            <a:r>
+            <a:pPr lvl="1">
+              <a:defRPr sz="1800"/>
+            </a:pPr>
+            <a:r>
+              <a:rPr sz="2400" dirty="0"/>
               <a:t>The model step (embedding/inference)?</a:t>
             </a:r>
           </a:p>
           <a:p>
-            <a:pPr>
-              <a:defRPr sz="1800"/>
-            </a:pPr>
-            <a:r>
-              <a:t>Post-model (routing/formatting)?</a:t>
+            <a:pPr lvl="1">
+              <a:defRPr sz="1800"/>
+            </a:pPr>
+            <a:r>
+              <a:rPr sz="2400" dirty="0"/>
+              <a:t>Post-model (routing/formatting</a:t>
+            </a:r>
+            <a:r>
+              <a:rPr lang="en-GB" sz="2400" dirty="0"/>
+              <a:t> of the results</a:t>
+            </a:r>
+            <a:r>
+              <a:rPr sz="2400" dirty="0"/>
+              <a:t>)?</a:t>
             </a:r>
           </a:p>
         </p:txBody>
@@ -5466,7 +6154,7 @@
 </file>
 
 <file path=ppt/slides/slide6.xml><?xml version="1.0" encoding="utf-8"?>
-<p:sld xmlns:a="http://schemas.openxmlformats.org/drawingml/2006/main" xmlns:p="http://schemas.openxmlformats.org/presentationml/2006/main" xmlns:r="http://schemas.openxmlformats.org/officeDocument/2006/relationships">
+<p:sld xmlns:a="http://schemas.openxmlformats.org/drawingml/2006/main" xmlns:r="http://schemas.openxmlformats.org/officeDocument/2006/relationships" xmlns:p="http://schemas.openxmlformats.org/presentationml/2006/main">
   <p:cSld>
     <p:spTree>
       <p:nvGrpSpPr>
@@ -5474,7 +6162,14 @@
         <p:cNvGrpSpPr/>
         <p:nvPr/>
       </p:nvGrpSpPr>
-      <p:grpSpPr/>
+      <p:grpSpPr>
+        <a:xfrm>
+          <a:off x="0" y="0"/>
+          <a:ext cx="0" cy="0"/>
+          <a:chOff x="0" y="0"/>
+          <a:chExt cx="0" cy="0"/>
+        </a:xfrm>
+      </p:grpSpPr>
       <p:sp>
         <p:nvSpPr>
           <p:cNvPr id="2" name="Title 1"/>
@@ -5491,7 +6186,16 @@
           <a:lstStyle/>
           <a:p>
             <a:r>
-              <a:t>The minimal system we will use</a:t>
+              <a:rPr dirty="0"/>
+              <a:t>The </a:t>
+            </a:r>
+            <a:r>
+              <a:rPr lang="en-GB" dirty="0"/>
+              <a:t>MVP</a:t>
+            </a:r>
+            <a:r>
+              <a:rPr dirty="0"/>
+              <a:t> we will use</a:t>
             </a:r>
           </a:p>
         </p:txBody>
@@ -5508,46 +6212,57 @@
         </p:nvSpPr>
         <p:spPr/>
         <p:txBody>
-          <a:bodyPr/>
+          <a:bodyPr>
+            <a:normAutofit/>
+          </a:bodyPr>
           <a:lstStyle/>
           <a:p>
             <a:pPr>
               <a:defRPr sz="1800"/>
             </a:pPr>
             <a:r>
+              <a:rPr sz="2400" dirty="0"/>
               <a:t>We intentionally use only:</a:t>
             </a:r>
           </a:p>
           <a:p>
-            <a:pPr>
-              <a:defRPr sz="1800"/>
-            </a:pPr>
-            <a:r>
+            <a:pPr lvl="1">
+              <a:defRPr sz="1800"/>
+            </a:pPr>
+            <a:r>
+              <a:rPr sz="2400" dirty="0"/>
               <a:t>AWS Step Functions (orchestration map)</a:t>
             </a:r>
           </a:p>
           <a:p>
-            <a:pPr>
-              <a:defRPr sz="1800"/>
-            </a:pPr>
-            <a:r>
+            <a:pPr lvl="1">
+              <a:defRPr sz="1800"/>
+            </a:pPr>
+            <a:r>
+              <a:rPr sz="2400" dirty="0"/>
               <a:t>3 AWS Lambda functions (pre → model → post)</a:t>
             </a:r>
           </a:p>
           <a:p>
-            <a:pPr>
-              <a:defRPr sz="1800"/>
-            </a:pPr>
-            <a:r>
+            <a:pPr lvl="1">
+              <a:defRPr sz="1800"/>
+            </a:pPr>
+            <a:r>
+              <a:rPr sz="2400" dirty="0"/>
               <a:t>CloudWatch dashboard + logs (observability)</a:t>
             </a:r>
           </a:p>
           <a:p>
-            <a:pPr>
-              <a:defRPr sz="1800"/>
-            </a:pPr>
-            <a:r>
-              <a:t>CloudShell + CloudFormation (repeatable setup)</a:t>
+            <a:pPr lvl="1">
+              <a:defRPr sz="1800"/>
+            </a:pPr>
+            <a:r>
+              <a:rPr sz="2400" dirty="0" err="1"/>
+              <a:t>CloudShell</a:t>
+            </a:r>
+            <a:r>
+              <a:rPr sz="2400" dirty="0"/>
+              <a:t> + CloudFormation (repeatable setup)</a:t>
             </a:r>
           </a:p>
         </p:txBody>
@@ -5561,7 +6276,7 @@
 </file>
 
 <file path=ppt/slides/slide7.xml><?xml version="1.0" encoding="utf-8"?>
-<p:sld xmlns:a="http://schemas.openxmlformats.org/drawingml/2006/main" xmlns:p="http://schemas.openxmlformats.org/presentationml/2006/main" xmlns:r="http://schemas.openxmlformats.org/officeDocument/2006/relationships">
+<p:sld xmlns:a="http://schemas.openxmlformats.org/drawingml/2006/main" xmlns:r="http://schemas.openxmlformats.org/officeDocument/2006/relationships" xmlns:p="http://schemas.openxmlformats.org/presentationml/2006/main">
   <p:cSld>
     <p:spTree>
       <p:nvGrpSpPr>
@@ -5569,7 +6284,14 @@
         <p:cNvGrpSpPr/>
         <p:nvPr/>
       </p:nvGrpSpPr>
-      <p:grpSpPr/>
+      <p:grpSpPr>
+        <a:xfrm>
+          <a:off x="0" y="0"/>
+          <a:ext cx="0" cy="0"/>
+          <a:chOff x="0" y="0"/>
+          <a:chExt cx="0" cy="0"/>
+        </a:xfrm>
+      </p:grpSpPr>
       <p:sp>
         <p:nvSpPr>
           <p:cNvPr id="2" name="Title 1"/>
@@ -5610,30 +6332,34 @@
               <a:defRPr sz="1800"/>
             </a:pPr>
             <a:r>
+              <a:rPr dirty="0"/>
               <a:t>Step Functions orchestrates:</a:t>
             </a:r>
           </a:p>
           <a:p>
-            <a:pPr>
-              <a:defRPr sz="1800"/>
-            </a:pPr>
-            <a:r>
+            <a:pPr lvl="1">
+              <a:defRPr sz="1800"/>
+            </a:pPr>
+            <a:r>
+              <a:rPr dirty="0"/>
               <a:t>1) Preprocess Lambda (fast)</a:t>
             </a:r>
           </a:p>
           <a:p>
-            <a:pPr>
-              <a:defRPr sz="1800"/>
-            </a:pPr>
-            <a:r>
+            <a:pPr lvl="1">
+              <a:defRPr sz="1800"/>
+            </a:pPr>
+            <a:r>
+              <a:rPr dirty="0"/>
               <a:t>2) Embed/“Model” Lambda (slow + throttled on purpose)</a:t>
             </a:r>
           </a:p>
           <a:p>
-            <a:pPr>
-              <a:defRPr sz="1800"/>
-            </a:pPr>
-            <a:r>
+            <a:pPr lvl="1">
+              <a:defRPr sz="1800"/>
+            </a:pPr>
+            <a:r>
+              <a:rPr dirty="0"/>
               <a:t>3) Postprocess Lambda (fast)</a:t>
             </a:r>
           </a:p>
@@ -5648,7 +6374,7 @@
 </file>
 
 <file path=ppt/slides/slide8.xml><?xml version="1.0" encoding="utf-8"?>
-<p:sld xmlns:a="http://schemas.openxmlformats.org/drawingml/2006/main" xmlns:p="http://schemas.openxmlformats.org/presentationml/2006/main" xmlns:r="http://schemas.openxmlformats.org/officeDocument/2006/relationships">
+<p:sld xmlns:a="http://schemas.openxmlformats.org/drawingml/2006/main" xmlns:r="http://schemas.openxmlformats.org/officeDocument/2006/relationships" xmlns:p="http://schemas.openxmlformats.org/presentationml/2006/main">
   <p:cSld>
     <p:spTree>
       <p:nvGrpSpPr>
@@ -5656,7 +6382,14 @@
         <p:cNvGrpSpPr/>
         <p:nvPr/>
       </p:nvGrpSpPr>
-      <p:grpSpPr/>
+      <p:grpSpPr>
+        <a:xfrm>
+          <a:off x="0" y="0"/>
+          <a:ext cx="0" cy="0"/>
+          <a:chOff x="0" y="0"/>
+          <a:chExt cx="0" cy="0"/>
+        </a:xfrm>
+      </p:grpSpPr>
       <p:sp>
         <p:nvSpPr>
           <p:cNvPr id="2" name="Title 1"/>
@@ -5673,7 +6406,8 @@
           <a:lstStyle/>
           <a:p>
             <a:r>
-              <a:t>Observable reality (the only three graphs that matter)</a:t>
+              <a:rPr dirty="0"/>
+              <a:t>Observable reality</a:t>
             </a:r>
           </a:p>
         </p:txBody>
@@ -5697,32 +6431,59 @@
               <a:defRPr sz="1800"/>
             </a:pPr>
             <a:r>
+              <a:rPr dirty="0"/>
               <a:t>When load increases, watch:</a:t>
             </a:r>
           </a:p>
           <a:p>
+            <a:pPr lvl="1">
+              <a:defRPr sz="1800"/>
+            </a:pPr>
+            <a:r>
+              <a:rPr dirty="0"/>
+              <a:t>Latency (duration p95)</a:t>
+            </a:r>
+          </a:p>
+          <a:p>
+            <a:pPr lvl="1">
+              <a:defRPr sz="1800"/>
+            </a:pPr>
+            <a:r>
+              <a:rPr dirty="0"/>
+              <a:t>Errors (failed executions)</a:t>
+            </a:r>
+          </a:p>
+          <a:p>
+            <a:pPr lvl="1">
+              <a:defRPr sz="1800"/>
+            </a:pPr>
+            <a:r>
+              <a:rPr dirty="0"/>
+              <a:t>Throttles (requests rejected due to limits)</a:t>
+            </a:r>
+            <a:endParaRPr lang="en-GB" dirty="0"/>
+          </a:p>
+          <a:p>
+            <a:pPr lvl="1">
+              <a:defRPr sz="1800"/>
+            </a:pPr>
+            <a:endParaRPr lang="en-GB" dirty="0"/>
+          </a:p>
+          <a:p>
             <a:pPr>
               <a:defRPr sz="1800"/>
             </a:pPr>
             <a:r>
-              <a:t>Latency (duration p95)</a:t>
-            </a:r>
-          </a:p>
-          <a:p>
-            <a:pPr>
-              <a:defRPr sz="1800"/>
-            </a:pPr>
-            <a:r>
-              <a:t>Errors (failed executions)</a:t>
-            </a:r>
-          </a:p>
-          <a:p>
-            <a:pPr>
-              <a:defRPr sz="1800"/>
-            </a:pPr>
-            <a:r>
-              <a:t>Throttles (requests rejected due to limits)</a:t>
-            </a:r>
+              <a:rPr lang="en-GB" dirty="0"/>
+              <a:t>These are he only three graphs that matter today </a:t>
+            </a:r>
+            <a:r>
+              <a:rPr lang="en-GB" dirty="0">
+                <a:sym typeface="Wingdings" panose="05000000000000000000" pitchFamily="2" charset="2"/>
+              </a:rPr>
+              <a:t></a:t>
+            </a:r>
+            <a:endParaRPr dirty="0"/>
           </a:p>
         </p:txBody>
       </p:sp>
@@ -5735,7 +6496,7 @@
 </file>
 
 <file path=ppt/slides/slide9.xml><?xml version="1.0" encoding="utf-8"?>
-<p:sld xmlns:a="http://schemas.openxmlformats.org/drawingml/2006/main" xmlns:p="http://schemas.openxmlformats.org/presentationml/2006/main" xmlns:r="http://schemas.openxmlformats.org/officeDocument/2006/relationships">
+<p:sld xmlns:a="http://schemas.openxmlformats.org/drawingml/2006/main" xmlns:r="http://schemas.openxmlformats.org/officeDocument/2006/relationships" xmlns:p="http://schemas.openxmlformats.org/presentationml/2006/main">
   <p:cSld>
     <p:spTree>
       <p:nvGrpSpPr>
@@ -5743,7 +6504,14 @@
         <p:cNvGrpSpPr/>
         <p:nvPr/>
       </p:nvGrpSpPr>
-      <p:grpSpPr/>
+      <p:grpSpPr>
+        <a:xfrm>
+          <a:off x="0" y="0"/>
+          <a:ext cx="0" cy="0"/>
+          <a:chOff x="0" y="0"/>
+          <a:chExt cx="0" cy="0"/>
+        </a:xfrm>
+      </p:grpSpPr>
       <p:sp>
         <p:nvSpPr>
           <p:cNvPr id="2" name="Title 1"/>
@@ -5784,39 +6552,82 @@
               <a:defRPr sz="1800"/>
             </a:pPr>
             <a:r>
+              <a:rPr dirty="0"/>
               <a:t>By lunch you will be able to:</a:t>
             </a:r>
           </a:p>
           <a:p>
+            <a:pPr lvl="1">
+              <a:defRPr sz="1800"/>
+            </a:pPr>
+            <a:r>
+              <a:rPr dirty="0"/>
+              <a:t>1) Run one clean “happy path” request</a:t>
+            </a:r>
+            <a:r>
+              <a:rPr lang="en-GB" dirty="0"/>
+              <a:t> </a:t>
+            </a:r>
+            <a:r>
+              <a:rPr lang="en-GB" dirty="0">
+                <a:sym typeface="Wingdings" panose="05000000000000000000" pitchFamily="2" charset="2"/>
+              </a:rPr>
+              <a:t></a:t>
+            </a:r>
+            <a:endParaRPr dirty="0"/>
+          </a:p>
+          <a:p>
+            <a:pPr lvl="1">
+              <a:defRPr sz="1800"/>
+            </a:pPr>
+            <a:r>
+              <a:rPr dirty="0"/>
+              <a:t>2) Create a burst that hits a scaling wall</a:t>
+            </a:r>
+            <a:r>
+              <a:rPr lang="en-GB" dirty="0"/>
+              <a:t>!</a:t>
+            </a:r>
+            <a:endParaRPr dirty="0"/>
+          </a:p>
+          <a:p>
+            <a:pPr lvl="1">
+              <a:defRPr sz="1800"/>
+            </a:pPr>
+            <a:r>
+              <a:rPr dirty="0"/>
+              <a:t>3) Point to </a:t>
+            </a:r>
+            <a:r>
+              <a:rPr b="1" dirty="0"/>
+              <a:t>which</a:t>
+            </a:r>
+            <a:r>
+              <a:rPr dirty="0"/>
+              <a:t> step caused the wall and prove it with evidence</a:t>
+            </a:r>
+          </a:p>
+          <a:p>
             <a:pPr>
               <a:defRPr sz="1800"/>
             </a:pPr>
-            <a:r>
-              <a:t>1) Run one clean “happy path” request</a:t>
-            </a:r>
+            <a:endParaRPr lang="en-GB" dirty="0"/>
           </a:p>
           <a:p>
             <a:pPr>
               <a:defRPr sz="1800"/>
             </a:pPr>
             <a:r>
-              <a:t>2) Create a burst that hits a scaling wall</a:t>
-            </a:r>
-          </a:p>
-          <a:p>
-            <a:pPr>
-              <a:defRPr sz="1800"/>
-            </a:pPr>
-            <a:r>
-              <a:t>3) Point to *which* step caused the wall and prove it with evidence</a:t>
-            </a:r>
-          </a:p>
-          <a:p>
-            <a:pPr>
-              <a:defRPr sz="1800"/>
-            </a:pPr>
-            <a:r>
-              <a:t>Evidence = dashboard + execution graph + log line.</a:t>
+              <a:rPr b="1" dirty="0"/>
+              <a:t>Evidence</a:t>
+            </a:r>
+            <a:r>
+              <a:rPr dirty="0"/>
+              <a:t> = </a:t>
+            </a:r>
+            <a:r>
+              <a:rPr i="1" dirty="0"/>
+              <a:t>dashboard + execution graph + log line</a:t>
             </a:r>
           </a:p>
         </p:txBody>
@@ -6160,44 +6971,44 @@
         <a:sysClr val="window" lastClr="FFFFFF"/>
       </a:lt1>
       <a:dk2>
-        <a:srgbClr val="1F497D"/>
+        <a:srgbClr val="0E2841"/>
       </a:dk2>
       <a:lt2>
-        <a:srgbClr val="EEECE1"/>
+        <a:srgbClr val="E8E8E8"/>
       </a:lt2>
       <a:accent1>
-        <a:srgbClr val="4F81BD"/>
+        <a:srgbClr val="156082"/>
       </a:accent1>
       <a:accent2>
-        <a:srgbClr val="C0504D"/>
+        <a:srgbClr val="E97132"/>
       </a:accent2>
       <a:accent3>
-        <a:srgbClr val="9BBB59"/>
+        <a:srgbClr val="196B24"/>
       </a:accent3>
       <a:accent4>
-        <a:srgbClr val="8064A2"/>
+        <a:srgbClr val="0F9ED5"/>
       </a:accent4>
       <a:accent5>
-        <a:srgbClr val="4BACC6"/>
+        <a:srgbClr val="A02B93"/>
       </a:accent5>
       <a:accent6>
-        <a:srgbClr val="F79646"/>
+        <a:srgbClr val="4EA72E"/>
       </a:accent6>
       <a:hlink>
-        <a:srgbClr val="0000FF"/>
+        <a:srgbClr val="467886"/>
       </a:hlink>
       <a:folHlink>
-        <a:srgbClr val="800080"/>
+        <a:srgbClr val="96607D"/>
       </a:folHlink>
     </a:clrScheme>
     <a:fontScheme name="Office">
       <a:majorFont>
-        <a:latin typeface="Calibri"/>
+        <a:latin typeface="Aptos Display" panose="02110004020202020204"/>
         <a:ea typeface=""/>
         <a:cs typeface=""/>
-        <a:font script="Jpan" typeface="ＭＳ Ｐゴシック"/>
+        <a:font script="Jpan" typeface="游ゴシック Light"/>
         <a:font script="Hang" typeface="맑은 고딕"/>
-        <a:font script="Hans" typeface="宋体"/>
+        <a:font script="Hans" typeface="等线 Light"/>
         <a:font script="Hant" typeface="新細明體"/>
         <a:font script="Arab" typeface="Times New Roman"/>
         <a:font script="Hebr" typeface="Times New Roman"/>
@@ -6225,14 +7036,31 @@
         <a:font script="Viet" typeface="Times New Roman"/>
         <a:font script="Uigh" typeface="Microsoft Uighur"/>
         <a:font script="Geor" typeface="Sylfaen"/>
+        <a:font script="Armn" typeface="Arial"/>
+        <a:font script="Bugi" typeface="Leelawadee UI"/>
+        <a:font script="Bopo" typeface="Microsoft JhengHei"/>
+        <a:font script="Java" typeface="Javanese Text"/>
+        <a:font script="Lisu" typeface="Segoe UI"/>
+        <a:font script="Mymr" typeface="Myanmar Text"/>
+        <a:font script="Nkoo" typeface="Ebrima"/>
+        <a:font script="Olck" typeface="Nirmala UI"/>
+        <a:font script="Osma" typeface="Ebrima"/>
+        <a:font script="Phag" typeface="Phagspa"/>
+        <a:font script="Syrn" typeface="Estrangelo Edessa"/>
+        <a:font script="Syrj" typeface="Estrangelo Edessa"/>
+        <a:font script="Syre" typeface="Estrangelo Edessa"/>
+        <a:font script="Sora" typeface="Nirmala UI"/>
+        <a:font script="Tale" typeface="Microsoft Tai Le"/>
+        <a:font script="Talu" typeface="Microsoft New Tai Lue"/>
+        <a:font script="Tfng" typeface="Ebrima"/>
       </a:majorFont>
       <a:minorFont>
-        <a:latin typeface="Calibri"/>
+        <a:latin typeface="Aptos" panose="02110004020202020204"/>
         <a:ea typeface=""/>
         <a:cs typeface=""/>
-        <a:font script="Jpan" typeface="ＭＳ Ｐゴシック"/>
+        <a:font script="Jpan" typeface="游ゴシック"/>
         <a:font script="Hang" typeface="맑은 고딕"/>
-        <a:font script="Hans" typeface="宋体"/>
+        <a:font script="Hans" typeface="等线"/>
         <a:font script="Hant" typeface="新細明體"/>
         <a:font script="Arab" typeface="Arial"/>
         <a:font script="Hebr" typeface="Arial"/>
@@ -6260,6 +7088,23 @@
         <a:font script="Viet" typeface="Arial"/>
         <a:font script="Uigh" typeface="Microsoft Uighur"/>
         <a:font script="Geor" typeface="Sylfaen"/>
+        <a:font script="Armn" typeface="Arial"/>
+        <a:font script="Bugi" typeface="Leelawadee UI"/>
+        <a:font script="Bopo" typeface="Microsoft JhengHei"/>
+        <a:font script="Java" typeface="Javanese Text"/>
+        <a:font script="Lisu" typeface="Segoe UI"/>
+        <a:font script="Mymr" typeface="Myanmar Text"/>
+        <a:font script="Nkoo" typeface="Ebrima"/>
+        <a:font script="Olck" typeface="Nirmala UI"/>
+        <a:font script="Osma" typeface="Ebrima"/>
+        <a:font script="Phag" typeface="Phagspa"/>
+        <a:font script="Syrn" typeface="Estrangelo Edessa"/>
+        <a:font script="Syrj" typeface="Estrangelo Edessa"/>
+        <a:font script="Syre" typeface="Estrangelo Edessa"/>
+        <a:font script="Sora" typeface="Nirmala UI"/>
+        <a:font script="Tale" typeface="Microsoft Tai Le"/>
+        <a:font script="Talu" typeface="Microsoft New Tai Lue"/>
+        <a:font script="Tfng" typeface="Ebrima"/>
       </a:minorFont>
     </a:fontScheme>
     <a:fmtScheme name="Office">
@@ -6271,180 +7116,136 @@
           <a:gsLst>
             <a:gs pos="0">
               <a:schemeClr val="phClr">
-                <a:tint val="50000"/>
-                <a:satMod val="300000"/>
+                <a:lumMod val="110000"/>
+                <a:satMod val="105000"/>
+                <a:tint val="67000"/>
               </a:schemeClr>
             </a:gs>
-            <a:gs pos="35000">
+            <a:gs pos="50000">
               <a:schemeClr val="phClr">
-                <a:tint val="37000"/>
-                <a:satMod val="300000"/>
+                <a:lumMod val="105000"/>
+                <a:satMod val="103000"/>
+                <a:tint val="73000"/>
               </a:schemeClr>
             </a:gs>
             <a:gs pos="100000">
               <a:schemeClr val="phClr">
-                <a:tint val="15000"/>
-                <a:satMod val="350000"/>
+                <a:lumMod val="105000"/>
+                <a:satMod val="109000"/>
+                <a:tint val="81000"/>
               </a:schemeClr>
             </a:gs>
           </a:gsLst>
-          <a:lin ang="16200000" scaled="1"/>
+          <a:lin ang="5400000" scaled="0"/>
         </a:gradFill>
         <a:gradFill rotWithShape="1">
           <a:gsLst>
             <a:gs pos="0">
               <a:schemeClr val="phClr">
-                <a:tint val="100000"/>
+                <a:satMod val="103000"/>
+                <a:lumMod val="102000"/>
+                <a:tint val="94000"/>
+              </a:schemeClr>
+            </a:gs>
+            <a:gs pos="50000">
+              <a:schemeClr val="phClr">
+                <a:satMod val="110000"/>
+                <a:lumMod val="100000"/>
                 <a:shade val="100000"/>
-                <a:satMod val="130000"/>
               </a:schemeClr>
             </a:gs>
             <a:gs pos="100000">
               <a:schemeClr val="phClr">
-                <a:tint val="50000"/>
-                <a:shade val="100000"/>
-                <a:satMod val="350000"/>
+                <a:lumMod val="99000"/>
+                <a:satMod val="120000"/>
+                <a:shade val="78000"/>
               </a:schemeClr>
             </a:gs>
           </a:gsLst>
-          <a:lin ang="16200000" scaled="0"/>
+          <a:lin ang="5400000" scaled="0"/>
         </a:gradFill>
       </a:fillStyleLst>
       <a:lnStyleLst>
-        <a:ln w="9525" cap="flat" cmpd="sng" algn="ctr">
+        <a:ln w="12700" cap="flat" cmpd="sng" algn="ctr">
           <a:solidFill>
-            <a:schemeClr val="phClr">
-              <a:shade val="95000"/>
-              <a:satMod val="105000"/>
-            </a:schemeClr>
+            <a:schemeClr val="phClr"/>
           </a:solidFill>
           <a:prstDash val="solid"/>
+          <a:miter lim="800000"/>
+        </a:ln>
+        <a:ln w="19050" cap="flat" cmpd="sng" algn="ctr">
+          <a:solidFill>
+            <a:schemeClr val="phClr"/>
+          </a:solidFill>
+          <a:prstDash val="solid"/>
+          <a:miter lim="800000"/>
         </a:ln>
         <a:ln w="25400" cap="flat" cmpd="sng" algn="ctr">
           <a:solidFill>
             <a:schemeClr val="phClr"/>
           </a:solidFill>
           <a:prstDash val="solid"/>
-        </a:ln>
-        <a:ln w="38100" cap="flat" cmpd="sng" algn="ctr">
-          <a:solidFill>
-            <a:schemeClr val="phClr"/>
-          </a:solidFill>
-          <a:prstDash val="solid"/>
+          <a:miter lim="800000"/>
         </a:ln>
       </a:lnStyleLst>
       <a:effectStyleLst>
         <a:effectStyle>
+          <a:effectLst/>
+        </a:effectStyle>
+        <a:effectStyle>
+          <a:effectLst/>
+        </a:effectStyle>
+        <a:effectStyle>
           <a:effectLst>
-            <a:outerShdw blurRad="40000" dist="20000" dir="5400000" rotWithShape="0">
+            <a:outerShdw blurRad="57150" dist="19050" dir="5400000" algn="ctr" rotWithShape="0">
               <a:srgbClr val="000000">
-                <a:alpha val="38000"/>
+                <a:alpha val="63000"/>
               </a:srgbClr>
             </a:outerShdw>
           </a:effectLst>
-        </a:effectStyle>
-        <a:effectStyle>
-          <a:effectLst>
-            <a:outerShdw blurRad="40000" dist="23000" dir="5400000" rotWithShape="0">
-              <a:srgbClr val="000000">
-                <a:alpha val="35000"/>
-              </a:srgbClr>
-            </a:outerShdw>
-          </a:effectLst>
-        </a:effectStyle>
-        <a:effectStyle>
-          <a:effectLst>
-            <a:outerShdw blurRad="40000" dist="23000" dir="5400000" rotWithShape="0">
-              <a:srgbClr val="000000">
-                <a:alpha val="35000"/>
-              </a:srgbClr>
-            </a:outerShdw>
-          </a:effectLst>
-          <a:scene3d>
-            <a:camera prst="orthographicFront">
-              <a:rot lat="0" lon="0" rev="0"/>
-            </a:camera>
-            <a:lightRig rig="threePt" dir="t">
-              <a:rot lat="0" lon="0" rev="1200000"/>
-            </a:lightRig>
-          </a:scene3d>
-          <a:sp3d>
-            <a:bevelT w="63500" h="25400"/>
-          </a:sp3d>
         </a:effectStyle>
       </a:effectStyleLst>
       <a:bgFillStyleLst>
         <a:solidFill>
           <a:schemeClr val="phClr"/>
         </a:solidFill>
+        <a:solidFill>
+          <a:schemeClr val="phClr">
+            <a:tint val="95000"/>
+            <a:satMod val="170000"/>
+          </a:schemeClr>
+        </a:solidFill>
         <a:gradFill rotWithShape="1">
           <a:gsLst>
             <a:gs pos="0">
               <a:schemeClr val="phClr">
-                <a:tint val="40000"/>
-                <a:satMod val="350000"/>
+                <a:tint val="93000"/>
+                <a:satMod val="150000"/>
+                <a:shade val="98000"/>
+                <a:lumMod val="102000"/>
               </a:schemeClr>
             </a:gs>
-            <a:gs pos="40000">
+            <a:gs pos="50000">
               <a:schemeClr val="phClr">
-                <a:tint val="45000"/>
-                <a:shade val="99000"/>
-                <a:satMod val="350000"/>
+                <a:tint val="98000"/>
+                <a:satMod val="130000"/>
+                <a:shade val="90000"/>
+                <a:lumMod val="103000"/>
               </a:schemeClr>
             </a:gs>
             <a:gs pos="100000">
               <a:schemeClr val="phClr">
-                <a:shade val="20000"/>
-                <a:satMod val="255000"/>
+                <a:shade val="63000"/>
+                <a:satMod val="120000"/>
               </a:schemeClr>
             </a:gs>
           </a:gsLst>
-          <a:path path="circle">
-            <a:fillToRect l="50000" t="-80000" r="50000" b="180000"/>
-          </a:path>
-        </a:gradFill>
-        <a:gradFill rotWithShape="1">
-          <a:gsLst>
-            <a:gs pos="0">
-              <a:schemeClr val="phClr">
-                <a:tint val="80000"/>
-                <a:satMod val="300000"/>
-              </a:schemeClr>
-            </a:gs>
-            <a:gs pos="100000">
-              <a:schemeClr val="phClr">
-                <a:shade val="30000"/>
-                <a:satMod val="200000"/>
-              </a:schemeClr>
-            </a:gs>
-          </a:gsLst>
-          <a:path path="circle">
-            <a:fillToRect l="50000" t="50000" r="50000" b="50000"/>
-          </a:path>
+          <a:lin ang="5400000" scaled="0"/>
         </a:gradFill>
       </a:bgFillStyleLst>
     </a:fmtScheme>
   </a:themeElements>
   <a:objectDefaults>
-    <a:spDef>
-      <a:spPr/>
-      <a:bodyPr/>
-      <a:lstStyle/>
-      <a:style>
-        <a:lnRef idx="1">
-          <a:schemeClr val="accent1"/>
-        </a:lnRef>
-        <a:fillRef idx="3">
-          <a:schemeClr val="accent1"/>
-        </a:fillRef>
-        <a:effectRef idx="2">
-          <a:schemeClr val="accent1"/>
-        </a:effectRef>
-        <a:fontRef idx="minor">
-          <a:schemeClr val="lt1"/>
-        </a:fontRef>
-      </a:style>
-    </a:spDef>
     <a:lnDef>
       <a:spPr/>
       <a:bodyPr/>
@@ -6466,5 +7267,10 @@
     </a:lnDef>
   </a:objectDefaults>
   <a:extraClrSchemeLst/>
+  <a:extLst>
+    <a:ext uri="{05A4C25C-085E-4340-85A3-A5531E510DB2}">
+      <thm15:themeFamily xmlns:thm15="http://schemas.microsoft.com/office/thememl/2012/main" name="Office Theme" id="{2E142A2C-CD16-42D6-873A-C26D2A0506FA}" vid="{1BDDFF52-6CD6-40A5-AB3C-68EB2F1E4D0A}"/>
+    </a:ext>
+  </a:extLst>
 </a:theme>
 </file>